--- a/a7/build/out/u3/A7 3.T2  Slides.pptx
+++ b/a7/build/out/u3/A7 3.T2  Slides.pptx
@@ -38,6 +38,7 @@
     <p:sldId id="286" r:id="rId37"/>
     <p:sldId id="287" r:id="rId38"/>
     <p:sldId id="288" r:id="rId39"/>
+    <p:sldId id="289" r:id="rId40"/>
   </p:sldIdLst>
   <p:sldSz cx="12191969" cy="6858000" type="screen4x3"/>
   <p:notesSz cx="6858000" cy="9144000"/>
@@ -7275,9 +7276,44 @@
           </a:p>
         </p:txBody>
       </p:sp>
+      <p:sp>
+        <p:nvSpPr>
+          <p:cNvPr id="9" name="TextBox 8"/>
+          <p:cNvSpPr txBox="1"/>
+          <p:nvPr/>
+        </p:nvSpPr>
+        <p:spPr>
+          <a:xfrm>
+            <a:off x="3241040" y="2171700"/>
+            <a:ext cx="4846320" cy="457200"/>
+          </a:xfrm>
+          <a:prstGeom prst="rect">
+            <a:avLst/>
+          </a:prstGeom>
+          <a:noFill/>
+        </p:spPr>
+        <p:txBody>
+          <a:bodyPr wrap="none" lIns="45720" rIns="45720" tIns="18288" bIns="18288" anchor="ctr">
+            <a:spAutoFit/>
+          </a:bodyPr>
+          <a:lstStyle/>
+          <a:p>
+            <a:pPr algn="l"/>
+            <a:r>
+              <a:rPr sz="2600" b="0" i="0">
+                <a:solidFill>
+                  <a:srgbClr val="1A1A1A"/>
+                </a:solidFill>
+                <a:latin typeface="Century Schoolbook"/>
+              </a:rPr>
+              <a:t>A model's scale factor is  </a:t>
+            </a:r>
+          </a:p>
+        </p:txBody>
+      </p:sp>
       <p:pic>
         <p:nvPicPr>
-          <p:cNvPr id="9" name="Picture 8" descr="966cda65615d2f68.png"/>
+          <p:cNvPr id="10" name="Picture 9" descr="270dca7efd9a2928.png"/>
           <p:cNvPicPr>
             <a:picLocks noChangeAspect="1"/>
           </p:cNvPicPr>
@@ -7291,8 +7327,8 @@
         </p:blipFill>
         <p:spPr>
           <a:xfrm>
-            <a:off x="5628131" y="2194560"/>
-            <a:ext cx="905256" cy="432816"/>
+            <a:off x="7950200" y="2229612"/>
+            <a:ext cx="725424" cy="341376"/>
           </a:xfrm>
           <a:prstGeom prst="rect">
             <a:avLst/>
@@ -7301,7 +7337,112 @@
       </p:pic>
       <p:sp>
         <p:nvSpPr>
-          <p:cNvPr id="10" name="TextBox 9"/>
+          <p:cNvPr id="11" name="TextBox 10"/>
+          <p:cNvSpPr txBox="1"/>
+          <p:nvPr/>
+        </p:nvSpPr>
+        <p:spPr>
+          <a:xfrm>
+            <a:off x="8675624" y="2171700"/>
+            <a:ext cx="382016" cy="457200"/>
+          </a:xfrm>
+          <a:prstGeom prst="rect">
+            <a:avLst/>
+          </a:prstGeom>
+          <a:noFill/>
+        </p:spPr>
+        <p:txBody>
+          <a:bodyPr wrap="none" lIns="45720" rIns="45720" tIns="18288" bIns="18288" anchor="ctr">
+            <a:spAutoFit/>
+          </a:bodyPr>
+          <a:lstStyle/>
+          <a:p>
+            <a:pPr algn="l"/>
+            <a:r>
+              <a:rPr sz="2600" b="0" i="0">
+                <a:solidFill>
+                  <a:srgbClr val="1A1A1A"/>
+                </a:solidFill>
+                <a:latin typeface="Century Schoolbook"/>
+              </a:rPr>
+              <a:t>.</a:t>
+            </a:r>
+          </a:p>
+        </p:txBody>
+      </p:sp>
+      <p:sp>
+        <p:nvSpPr>
+          <p:cNvPr id="12" name="TextBox 11"/>
+          <p:cNvSpPr txBox="1"/>
+          <p:nvPr/>
+        </p:nvSpPr>
+        <p:spPr>
+          <a:xfrm>
+            <a:off x="777240" y="2880360"/>
+            <a:ext cx="10607040" cy="465151"/>
+          </a:xfrm>
+          <a:prstGeom prst="rect">
+            <a:avLst/>
+          </a:prstGeom>
+          <a:noFill/>
+        </p:spPr>
+        <p:txBody>
+          <a:bodyPr wrap="square" lIns="45720" rIns="45720" tIns="18288" bIns="18288" anchor="t">
+            <a:spAutoFit/>
+          </a:bodyPr>
+          <a:lstStyle/>
+          <a:p>
+            <a:pPr algn="ctr"/>
+            <a:r>
+              <a:rPr sz="2600" b="0" i="0">
+                <a:solidFill>
+                  <a:srgbClr val="1A1A1A"/>
+                </a:solidFill>
+                <a:latin typeface="Century Schoolbook"/>
+              </a:rPr>
+              <a:t>The model is 12 centimeters long.</a:t>
+            </a:r>
+          </a:p>
+        </p:txBody>
+      </p:sp>
+      <p:sp>
+        <p:nvSpPr>
+          <p:cNvPr id="13" name="TextBox 12"/>
+          <p:cNvSpPr txBox="1"/>
+          <p:nvPr/>
+        </p:nvSpPr>
+        <p:spPr>
+          <a:xfrm>
+            <a:off x="777240" y="3455239"/>
+            <a:ext cx="10607040" cy="465151"/>
+          </a:xfrm>
+          <a:prstGeom prst="rect">
+            <a:avLst/>
+          </a:prstGeom>
+          <a:noFill/>
+        </p:spPr>
+        <p:txBody>
+          <a:bodyPr wrap="square" lIns="45720" rIns="45720" tIns="18288" bIns="18288" anchor="t">
+            <a:spAutoFit/>
+          </a:bodyPr>
+          <a:lstStyle/>
+          <a:p>
+            <a:pPr algn="ctr"/>
+            <a:r>
+              <a:rPr sz="2600" b="0" i="0">
+                <a:solidFill>
+                  <a:srgbClr val="1A1A1A"/>
+                </a:solidFill>
+                <a:latin typeface="Century Schoolbook"/>
+              </a:rPr>
+              <a:t>Rewrite the factor using only positive exponents.</a:t>
+            </a:r>
+          </a:p>
+        </p:txBody>
+      </p:sp>
+      <p:sp>
+        <p:nvSpPr>
+          <p:cNvPr id="14" name="TextBox 13"/>
           <p:cNvSpPr txBox="1"/>
           <p:nvPr/>
         </p:nvSpPr>
@@ -7336,7 +7477,7 @@
       </p:sp>
       <p:sp>
         <p:nvSpPr>
-          <p:cNvPr id="11" name="TextBox 10"/>
+          <p:cNvPr id="15" name="TextBox 14"/>
           <p:cNvSpPr txBox="1"/>
           <p:nvPr/>
         </p:nvSpPr>
@@ -8201,9 +8342,44 @@
           </a:p>
         </p:txBody>
       </p:sp>
+      <p:sp>
+        <p:nvSpPr>
+          <p:cNvPr id="9" name="TextBox 8"/>
+          <p:cNvSpPr txBox="1"/>
+          <p:nvPr/>
+        </p:nvSpPr>
+        <p:spPr>
+          <a:xfrm>
+            <a:off x="3241040" y="2080260"/>
+            <a:ext cx="4846320" cy="457200"/>
+          </a:xfrm>
+          <a:prstGeom prst="rect">
+            <a:avLst/>
+          </a:prstGeom>
+          <a:noFill/>
+        </p:spPr>
+        <p:txBody>
+          <a:bodyPr wrap="none" lIns="45720" rIns="45720" tIns="18288" bIns="18288" anchor="ctr">
+            <a:spAutoFit/>
+          </a:bodyPr>
+          <a:lstStyle/>
+          <a:p>
+            <a:pPr algn="l"/>
+            <a:r>
+              <a:rPr sz="2600" b="0" i="0">
+                <a:solidFill>
+                  <a:srgbClr val="1A1A1A"/>
+                </a:solidFill>
+                <a:latin typeface="Century Schoolbook"/>
+              </a:rPr>
+              <a:t>A model's scale factor is  </a:t>
+            </a:r>
+          </a:p>
+        </p:txBody>
+      </p:sp>
       <p:pic>
         <p:nvPicPr>
-          <p:cNvPr id="9" name="Picture 8" descr="966cda65615d2f68.png"/>
+          <p:cNvPr id="10" name="Picture 9" descr="270dca7efd9a2928.png"/>
           <p:cNvPicPr>
             <a:picLocks noChangeAspect="1"/>
           </p:cNvPicPr>
@@ -8217,8 +8393,8 @@
         </p:blipFill>
         <p:spPr>
           <a:xfrm>
-            <a:off x="5628131" y="2103120"/>
-            <a:ext cx="905256" cy="432816"/>
+            <a:off x="7950200" y="2138171"/>
+            <a:ext cx="725424" cy="341376"/>
           </a:xfrm>
           <a:prstGeom prst="rect">
             <a:avLst/>
@@ -8227,13 +8403,118 @@
       </p:pic>
       <p:sp>
         <p:nvSpPr>
-          <p:cNvPr id="10" name="TextBox 9"/>
-          <p:cNvSpPr txBox="1"/>
-          <p:nvPr/>
-        </p:nvSpPr>
-        <p:spPr>
-          <a:xfrm>
-            <a:off x="1828800" y="2810255"/>
+          <p:cNvPr id="11" name="TextBox 10"/>
+          <p:cNvSpPr txBox="1"/>
+          <p:nvPr/>
+        </p:nvSpPr>
+        <p:spPr>
+          <a:xfrm>
+            <a:off x="8675624" y="2080260"/>
+            <a:ext cx="382016" cy="457200"/>
+          </a:xfrm>
+          <a:prstGeom prst="rect">
+            <a:avLst/>
+          </a:prstGeom>
+          <a:noFill/>
+        </p:spPr>
+        <p:txBody>
+          <a:bodyPr wrap="none" lIns="45720" rIns="45720" tIns="18288" bIns="18288" anchor="ctr">
+            <a:spAutoFit/>
+          </a:bodyPr>
+          <a:lstStyle/>
+          <a:p>
+            <a:pPr algn="l"/>
+            <a:r>
+              <a:rPr sz="2600" b="0" i="0">
+                <a:solidFill>
+                  <a:srgbClr val="1A1A1A"/>
+                </a:solidFill>
+                <a:latin typeface="Century Schoolbook"/>
+              </a:rPr>
+              <a:t>.</a:t>
+            </a:r>
+          </a:p>
+        </p:txBody>
+      </p:sp>
+      <p:sp>
+        <p:nvSpPr>
+          <p:cNvPr id="12" name="TextBox 11"/>
+          <p:cNvSpPr txBox="1"/>
+          <p:nvPr/>
+        </p:nvSpPr>
+        <p:spPr>
+          <a:xfrm>
+            <a:off x="777240" y="2788920"/>
+            <a:ext cx="10607040" cy="465151"/>
+          </a:xfrm>
+          <a:prstGeom prst="rect">
+            <a:avLst/>
+          </a:prstGeom>
+          <a:noFill/>
+        </p:spPr>
+        <p:txBody>
+          <a:bodyPr wrap="square" lIns="45720" rIns="45720" tIns="18288" bIns="18288" anchor="t">
+            <a:spAutoFit/>
+          </a:bodyPr>
+          <a:lstStyle/>
+          <a:p>
+            <a:pPr algn="ctr"/>
+            <a:r>
+              <a:rPr sz="2600" b="0" i="0">
+                <a:solidFill>
+                  <a:srgbClr val="1A1A1A"/>
+                </a:solidFill>
+                <a:latin typeface="Century Schoolbook"/>
+              </a:rPr>
+              <a:t>The model is 12 centimeters long.</a:t>
+            </a:r>
+          </a:p>
+        </p:txBody>
+      </p:sp>
+      <p:sp>
+        <p:nvSpPr>
+          <p:cNvPr id="13" name="TextBox 12"/>
+          <p:cNvSpPr txBox="1"/>
+          <p:nvPr/>
+        </p:nvSpPr>
+        <p:spPr>
+          <a:xfrm>
+            <a:off x="777240" y="3363799"/>
+            <a:ext cx="10607040" cy="465151"/>
+          </a:xfrm>
+          <a:prstGeom prst="rect">
+            <a:avLst/>
+          </a:prstGeom>
+          <a:noFill/>
+        </p:spPr>
+        <p:txBody>
+          <a:bodyPr wrap="square" lIns="45720" rIns="45720" tIns="18288" bIns="18288" anchor="t">
+            <a:spAutoFit/>
+          </a:bodyPr>
+          <a:lstStyle/>
+          <a:p>
+            <a:pPr algn="ctr"/>
+            <a:r>
+              <a:rPr sz="2600" b="0" i="0">
+                <a:solidFill>
+                  <a:srgbClr val="1A1A1A"/>
+                </a:solidFill>
+                <a:latin typeface="Century Schoolbook"/>
+              </a:rPr>
+              <a:t>Rewrite the factor using only positive exponents.</a:t>
+            </a:r>
+          </a:p>
+        </p:txBody>
+      </p:sp>
+      <p:sp>
+        <p:nvSpPr>
+          <p:cNvPr id="14" name="TextBox 13"/>
+          <p:cNvSpPr txBox="1"/>
+          <p:nvPr/>
+        </p:nvSpPr>
+        <p:spPr>
+          <a:xfrm>
+            <a:off x="1828800" y="3984398"/>
             <a:ext cx="8503920" cy="548640"/>
           </a:xfrm>
           <a:prstGeom prst="rect">
@@ -8262,13 +8543,13 @@
       </p:sp>
       <p:sp>
         <p:nvSpPr>
-          <p:cNvPr id="11" name="TextBox 10"/>
-          <p:cNvSpPr txBox="1"/>
-          <p:nvPr/>
-        </p:nvSpPr>
-        <p:spPr>
-          <a:xfrm>
-            <a:off x="4951476" y="4739639"/>
+          <p:cNvPr id="15" name="TextBox 14"/>
+          <p:cNvSpPr txBox="1"/>
+          <p:nvPr/>
+        </p:nvSpPr>
+        <p:spPr>
+          <a:xfrm>
+            <a:off x="4951476" y="4792118"/>
             <a:ext cx="1920240" cy="548640"/>
           </a:xfrm>
           <a:prstGeom prst="rect">
@@ -8297,7 +8578,7 @@
       </p:sp>
       <p:pic>
         <p:nvPicPr>
-          <p:cNvPr id="12" name="Picture 11" descr="3dda12ba15c79c04.png"/>
+          <p:cNvPr id="16" name="Picture 15" descr="3dda12ba15c79c04.png"/>
           <p:cNvPicPr>
             <a:picLocks noChangeAspect="1"/>
           </p:cNvPicPr>
@@ -8311,7 +8592,7 @@
         </p:blipFill>
         <p:spPr>
           <a:xfrm>
-            <a:off x="6871716" y="4663440"/>
+            <a:off x="6871716" y="4715918"/>
             <a:ext cx="338328" cy="701040"/>
           </a:xfrm>
           <a:prstGeom prst="rect">
@@ -15014,7 +15295,7 @@
                 </a:solidFill>
                 <a:latin typeface="Century Schoolbook"/>
               </a:rPr>
-              <a:t>IXL</a:t>
+              <a:t>Independent Set</a:t>
             </a:r>
           </a:p>
         </p:txBody>
@@ -15119,7 +15400,7 @@
                 </a:solidFill>
                 <a:latin typeface="Century Schoolbook"/>
               </a:rPr>
-              <a:t>Last five minutes.</a:t>
+              <a:t>Six questions. On your own, in silence.</a:t>
             </a:r>
           </a:p>
         </p:txBody>
@@ -15237,6 +15518,479 @@
         </p:nvSpPr>
         <p:spPr>
           <a:xfrm>
+            <a:off x="960120" y="2011680"/>
+            <a:ext cx="548640" cy="356616"/>
+          </a:xfrm>
+          <a:prstGeom prst="rect">
+            <a:avLst/>
+          </a:prstGeom>
+          <a:noFill/>
+        </p:spPr>
+        <p:txBody>
+          <a:bodyPr wrap="square" lIns="45720" rIns="45720" tIns="18288" bIns="18288" anchor="t">
+            <a:spAutoFit/>
+          </a:bodyPr>
+          <a:lstStyle/>
+          <a:p>
+            <a:pPr algn="l"/>
+            <a:r>
+              <a:rPr sz="2100" b="1" i="0">
+                <a:solidFill>
+                  <a:srgbClr val="0B5394"/>
+                </a:solidFill>
+                <a:latin typeface="Century Schoolbook"/>
+              </a:rPr>
+              <a:t>1.</a:t>
+            </a:r>
+          </a:p>
+        </p:txBody>
+      </p:sp>
+      <p:sp>
+        <p:nvSpPr>
+          <p:cNvPr id="10" name="TextBox 9"/>
+          <p:cNvSpPr txBox="1"/>
+          <p:nvPr/>
+        </p:nvSpPr>
+        <p:spPr>
+          <a:xfrm>
+            <a:off x="1554480" y="2011680"/>
+            <a:ext cx="9829800" cy="411480"/>
+          </a:xfrm>
+          <a:prstGeom prst="rect">
+            <a:avLst/>
+          </a:prstGeom>
+          <a:noFill/>
+        </p:spPr>
+        <p:txBody>
+          <a:bodyPr wrap="square" lIns="45720" rIns="45720" tIns="18288" bIns="18288" anchor="t">
+            <a:spAutoFit/>
+          </a:bodyPr>
+          <a:lstStyle/>
+          <a:p>
+            <a:pPr algn="l"/>
+            <a:r>
+              <a:rPr sz="2100" b="0" i="0">
+                <a:solidFill>
+                  <a:srgbClr val="1A1A1A"/>
+                </a:solidFill>
+                <a:latin typeface="Century Schoolbook"/>
+              </a:rPr>
+              <a:t>Six questions. Work down the page.</a:t>
+            </a:r>
+          </a:p>
+        </p:txBody>
+      </p:sp>
+      <p:sp>
+        <p:nvSpPr>
+          <p:cNvPr id="11" name="TextBox 10"/>
+          <p:cNvSpPr txBox="1"/>
+          <p:nvPr/>
+        </p:nvSpPr>
+        <p:spPr>
+          <a:xfrm>
+            <a:off x="960120" y="2551176"/>
+            <a:ext cx="548640" cy="356616"/>
+          </a:xfrm>
+          <a:prstGeom prst="rect">
+            <a:avLst/>
+          </a:prstGeom>
+          <a:noFill/>
+        </p:spPr>
+        <p:txBody>
+          <a:bodyPr wrap="square" lIns="45720" rIns="45720" tIns="18288" bIns="18288" anchor="t">
+            <a:spAutoFit/>
+          </a:bodyPr>
+          <a:lstStyle/>
+          <a:p>
+            <a:pPr algn="l"/>
+            <a:r>
+              <a:rPr sz="2100" b="1" i="0">
+                <a:solidFill>
+                  <a:srgbClr val="0B5394"/>
+                </a:solidFill>
+                <a:latin typeface="Century Schoolbook"/>
+              </a:rPr>
+              <a:t>2.</a:t>
+            </a:r>
+          </a:p>
+        </p:txBody>
+      </p:sp>
+      <p:sp>
+        <p:nvSpPr>
+          <p:cNvPr id="12" name="TextBox 11"/>
+          <p:cNvSpPr txBox="1"/>
+          <p:nvPr/>
+        </p:nvSpPr>
+        <p:spPr>
+          <a:xfrm>
+            <a:off x="1554480" y="2551176"/>
+            <a:ext cx="9829800" cy="411480"/>
+          </a:xfrm>
+          <a:prstGeom prst="rect">
+            <a:avLst/>
+          </a:prstGeom>
+          <a:noFill/>
+        </p:spPr>
+        <p:txBody>
+          <a:bodyPr wrap="square" lIns="45720" rIns="45720" tIns="18288" bIns="18288" anchor="t">
+            <a:spAutoFit/>
+          </a:bodyPr>
+          <a:lstStyle/>
+          <a:p>
+            <a:pPr algn="l"/>
+            <a:r>
+              <a:rPr sz="2100" b="0" i="0">
+                <a:solidFill>
+                  <a:srgbClr val="1A1A1A"/>
+                </a:solidFill>
+                <a:latin typeface="Century Schoolbook"/>
+              </a:rPr>
+              <a:t>Show the step that does the work, not just the answer.</a:t>
+            </a:r>
+          </a:p>
+        </p:txBody>
+      </p:sp>
+      <p:sp>
+        <p:nvSpPr>
+          <p:cNvPr id="13" name="TextBox 12"/>
+          <p:cNvSpPr txBox="1"/>
+          <p:nvPr/>
+        </p:nvSpPr>
+        <p:spPr>
+          <a:xfrm>
+            <a:off x="960120" y="3090672"/>
+            <a:ext cx="548640" cy="356616"/>
+          </a:xfrm>
+          <a:prstGeom prst="rect">
+            <a:avLst/>
+          </a:prstGeom>
+          <a:noFill/>
+        </p:spPr>
+        <p:txBody>
+          <a:bodyPr wrap="square" lIns="45720" rIns="45720" tIns="18288" bIns="18288" anchor="t">
+            <a:spAutoFit/>
+          </a:bodyPr>
+          <a:lstStyle/>
+          <a:p>
+            <a:pPr algn="l"/>
+            <a:r>
+              <a:rPr sz="2100" b="1" i="0">
+                <a:solidFill>
+                  <a:srgbClr val="0B5394"/>
+                </a:solidFill>
+                <a:latin typeface="Century Schoolbook"/>
+              </a:rPr>
+              <a:t>3.</a:t>
+            </a:r>
+          </a:p>
+        </p:txBody>
+      </p:sp>
+      <p:sp>
+        <p:nvSpPr>
+          <p:cNvPr id="14" name="TextBox 13"/>
+          <p:cNvSpPr txBox="1"/>
+          <p:nvPr/>
+        </p:nvSpPr>
+        <p:spPr>
+          <a:xfrm>
+            <a:off x="1554480" y="3090672"/>
+            <a:ext cx="9829800" cy="411480"/>
+          </a:xfrm>
+          <a:prstGeom prst="rect">
+            <a:avLst/>
+          </a:prstGeom>
+          <a:noFill/>
+        </p:spPr>
+        <p:txBody>
+          <a:bodyPr wrap="square" lIns="45720" rIns="45720" tIns="18288" bIns="18288" anchor="t">
+            <a:spAutoFit/>
+          </a:bodyPr>
+          <a:lstStyle/>
+          <a:p>
+            <a:pPr algn="l"/>
+            <a:r>
+              <a:rPr sz="2100" b="0" i="0">
+                <a:solidFill>
+                  <a:srgbClr val="1A1A1A"/>
+                </a:solidFill>
+                <a:latin typeface="Century Schoolbook"/>
+              </a:rPr>
+              <a:t>Silence until the six minutes are up.</a:t>
+            </a:r>
+          </a:p>
+        </p:txBody>
+      </p:sp>
+    </p:spTree>
+  </p:cSld>
+  <p:clrMapOvr>
+    <a:masterClrMapping/>
+  </p:clrMapOvr>
+</p:sld>
+</file>
+
+<file path=ppt/slides/slide34.xml><?xml version="1.0" encoding="utf-8"?>
+<p:sld xmlns:a="http://schemas.openxmlformats.org/drawingml/2006/main" xmlns:p="http://schemas.openxmlformats.org/presentationml/2006/main" xmlns:r="http://schemas.openxmlformats.org/officeDocument/2006/relationships">
+  <p:cSld>
+    <p:spTree>
+      <p:nvGrpSpPr>
+        <p:cNvPr id="1" name=""/>
+        <p:cNvGrpSpPr/>
+        <p:nvPr/>
+      </p:nvGrpSpPr>
+      <p:grpSpPr/>
+      <p:sp>
+        <p:nvSpPr>
+          <p:cNvPr id="2" name="TextBox 1"/>
+          <p:cNvSpPr txBox="1"/>
+          <p:nvPr/>
+        </p:nvSpPr>
+        <p:spPr>
+          <a:xfrm>
+            <a:off x="777240" y="365760"/>
+            <a:ext cx="10607040" cy="640080"/>
+          </a:xfrm>
+          <a:prstGeom prst="rect">
+            <a:avLst/>
+          </a:prstGeom>
+          <a:noFill/>
+        </p:spPr>
+        <p:txBody>
+          <a:bodyPr wrap="square" lIns="45720" rIns="45720" tIns="18288" bIns="18288" anchor="t">
+            <a:spAutoFit/>
+          </a:bodyPr>
+          <a:lstStyle/>
+          <a:p>
+            <a:pPr algn="l"/>
+            <a:r>
+              <a:rPr sz="3600" b="1" i="0">
+                <a:solidFill>
+                  <a:srgbClr val="1A1A1A"/>
+                </a:solidFill>
+                <a:latin typeface="Century Schoolbook"/>
+              </a:rPr>
+              <a:t>IXL</a:t>
+            </a:r>
+          </a:p>
+        </p:txBody>
+      </p:sp>
+      <p:cxnSp>
+        <p:nvCxnSpPr>
+          <p:cNvPr id="3" name="Connector 2"/>
+          <p:cNvCxnSpPr/>
+          <p:nvPr/>
+        </p:nvCxnSpPr>
+        <p:spPr>
+          <a:xfrm>
+            <a:off x="777240" y="1097280"/>
+            <a:ext cx="10607040" cy="0"/>
+          </a:xfrm>
+          <a:prstGeom prst="line">
+            <a:avLst/>
+          </a:prstGeom>
+          <a:ln w="19050">
+            <a:solidFill>
+              <a:srgbClr val="1A1A1A"/>
+            </a:solidFill>
+          </a:ln>
+        </p:spPr>
+        <p:style>
+          <a:lnRef idx="2">
+            <a:schemeClr val="accent1"/>
+          </a:lnRef>
+          <a:fillRef idx="0">
+            <a:schemeClr val="accent1"/>
+          </a:fillRef>
+          <a:effectRef idx="1">
+            <a:schemeClr val="accent1"/>
+          </a:effectRef>
+          <a:fontRef idx="minor">
+            <a:schemeClr val="tx1"/>
+          </a:fontRef>
+        </p:style>
+      </p:cxnSp>
+      <p:cxnSp>
+        <p:nvCxnSpPr>
+          <p:cNvPr id="4" name="Connector 3"/>
+          <p:cNvCxnSpPr/>
+          <p:nvPr/>
+        </p:nvCxnSpPr>
+        <p:spPr>
+          <a:xfrm>
+            <a:off x="777240" y="1179576"/>
+            <a:ext cx="10607040" cy="0"/>
+          </a:xfrm>
+          <a:prstGeom prst="line">
+            <a:avLst/>
+          </a:prstGeom>
+          <a:ln w="9525">
+            <a:solidFill>
+              <a:srgbClr val="1A1A1A"/>
+            </a:solidFill>
+          </a:ln>
+        </p:spPr>
+        <p:style>
+          <a:lnRef idx="2">
+            <a:schemeClr val="accent1"/>
+          </a:lnRef>
+          <a:fillRef idx="0">
+            <a:schemeClr val="accent1"/>
+          </a:fillRef>
+          <a:effectRef idx="1">
+            <a:schemeClr val="accent1"/>
+          </a:effectRef>
+          <a:fontRef idx="minor">
+            <a:schemeClr val="tx1"/>
+          </a:fontRef>
+        </p:style>
+      </p:cxnSp>
+      <p:sp>
+        <p:nvSpPr>
+          <p:cNvPr id="5" name="TextBox 4"/>
+          <p:cNvSpPr txBox="1"/>
+          <p:nvPr/>
+        </p:nvSpPr>
+        <p:spPr>
+          <a:xfrm>
+            <a:off x="777240" y="1261872"/>
+            <a:ext cx="10607040" cy="310896"/>
+          </a:xfrm>
+          <a:prstGeom prst="rect">
+            <a:avLst/>
+          </a:prstGeom>
+          <a:noFill/>
+        </p:spPr>
+        <p:txBody>
+          <a:bodyPr wrap="square" lIns="45720" rIns="45720" tIns="18288" bIns="18288" anchor="t">
+            <a:spAutoFit/>
+          </a:bodyPr>
+          <a:lstStyle/>
+          <a:p>
+            <a:pPr algn="l"/>
+            <a:r>
+              <a:rPr sz="1700" b="0" i="1">
+                <a:solidFill>
+                  <a:srgbClr val="6B6B6B"/>
+                </a:solidFill>
+                <a:latin typeface="Century Schoolbook"/>
+              </a:rPr>
+              <a:t>Last five minutes.</a:t>
+            </a:r>
+          </a:p>
+        </p:txBody>
+      </p:sp>
+      <p:cxnSp>
+        <p:nvCxnSpPr>
+          <p:cNvPr id="6" name="Connector 5"/>
+          <p:cNvCxnSpPr/>
+          <p:nvPr/>
+        </p:nvCxnSpPr>
+        <p:spPr>
+          <a:xfrm>
+            <a:off x="777240" y="6199632"/>
+            <a:ext cx="10607040" cy="0"/>
+          </a:xfrm>
+          <a:prstGeom prst="line">
+            <a:avLst/>
+          </a:prstGeom>
+          <a:ln w="9525">
+            <a:solidFill>
+              <a:srgbClr val="6B6B6B"/>
+            </a:solidFill>
+          </a:ln>
+        </p:spPr>
+        <p:style>
+          <a:lnRef idx="2">
+            <a:schemeClr val="accent1"/>
+          </a:lnRef>
+          <a:fillRef idx="0">
+            <a:schemeClr val="accent1"/>
+          </a:fillRef>
+          <a:effectRef idx="1">
+            <a:schemeClr val="accent1"/>
+          </a:effectRef>
+          <a:fontRef idx="minor">
+            <a:schemeClr val="tx1"/>
+          </a:fontRef>
+        </p:style>
+      </p:cxnSp>
+      <p:sp>
+        <p:nvSpPr>
+          <p:cNvPr id="7" name="TextBox 6"/>
+          <p:cNvSpPr txBox="1"/>
+          <p:nvPr/>
+        </p:nvSpPr>
+        <p:spPr>
+          <a:xfrm>
+            <a:off x="777240" y="6272784"/>
+            <a:ext cx="9692640" cy="274320"/>
+          </a:xfrm>
+          <a:prstGeom prst="rect">
+            <a:avLst/>
+          </a:prstGeom>
+          <a:noFill/>
+        </p:spPr>
+        <p:txBody>
+          <a:bodyPr wrap="square" lIns="45720" rIns="45720" tIns="18288" bIns="18288" anchor="t">
+            <a:spAutoFit/>
+          </a:bodyPr>
+          <a:lstStyle/>
+          <a:p>
+            <a:pPr algn="l"/>
+            <a:r>
+              <a:rPr sz="1100" b="0" i="1">
+                <a:solidFill>
+                  <a:srgbClr val="6B6B6B"/>
+                </a:solidFill>
+                <a:latin typeface="Century Schoolbook"/>
+              </a:rPr>
+              <a:t>Grade 7 Accelerated · Unit 3 · Thread A · Day 2 — Negative Exponents with Variable Bases</a:t>
+            </a:r>
+          </a:p>
+        </p:txBody>
+      </p:sp>
+      <p:sp>
+        <p:nvSpPr>
+          <p:cNvPr id="8" name="TextBox 7"/>
+          <p:cNvSpPr txBox="1"/>
+          <p:nvPr/>
+        </p:nvSpPr>
+        <p:spPr>
+          <a:xfrm>
+            <a:off x="10744200" y="6272784"/>
+            <a:ext cx="640080" cy="274320"/>
+          </a:xfrm>
+          <a:prstGeom prst="rect">
+            <a:avLst/>
+          </a:prstGeom>
+          <a:noFill/>
+        </p:spPr>
+        <p:txBody>
+          <a:bodyPr wrap="square" lIns="45720" rIns="45720" tIns="18288" bIns="18288" anchor="t">
+            <a:spAutoFit/>
+          </a:bodyPr>
+          <a:lstStyle/>
+          <a:p>
+            <a:pPr algn="r"/>
+            <a:r>
+              <a:rPr sz="1100" b="0" i="0">
+                <a:solidFill>
+                  <a:srgbClr val="6B6B6B"/>
+                </a:solidFill>
+                <a:latin typeface="Century Schoolbook"/>
+              </a:rPr>
+              <a:t>34</a:t>
+            </a:r>
+          </a:p>
+        </p:txBody>
+      </p:sp>
+      <p:sp>
+        <p:nvSpPr>
+          <p:cNvPr id="9" name="TextBox 8"/>
+          <p:cNvSpPr txBox="1"/>
+          <p:nvPr/>
+        </p:nvSpPr>
+        <p:spPr>
+          <a:xfrm>
             <a:off x="960120" y="1828800"/>
             <a:ext cx="548640" cy="356616"/>
           </a:xfrm>
@@ -15434,7 +16188,7 @@
                 </a:solidFill>
                 <a:latin typeface="Century Schoolbook"/>
               </a:rPr>
-              <a:t>Stop at a SmartScore of 67 on each skill. Whatever you do not finish is tonight's practice.</a:t>
+              <a:t>Every skill listed is required, to a SmartScore of 67. Due at the start of the next class.</a:t>
             </a:r>
           </a:p>
         </p:txBody>
@@ -15469,7 +16223,7 @@
                 </a:solidFill>
                 <a:latin typeface="Century Schoolbook"/>
               </a:rPr>
-              <a:t>Today's skills</a:t>
+              <a:t>Today's skills — all required</a:t>
             </a:r>
           </a:p>
         </p:txBody>

--- a/a7/build/out/u3/A7 3.T2  Slides.pptx
+++ b/a7/build/out/u3/A7 3.T2  Slides.pptx
@@ -10954,15 +10954,6 @@
               </a:rPr>
               <a:t>4/x</a:t>
             </a:r>
-            <a:r>
-              <a:rPr sz="2400" b="0" i="0" baseline="30000">
-                <a:solidFill>
-                  <a:srgbClr val="1A1A1A"/>
-                </a:solidFill>
-                <a:latin typeface="Century Schoolbook"/>
-              </a:rPr>
-              <a:t>5</a:t>
-            </a:r>
           </a:p>
         </p:txBody>
       </p:sp>
@@ -11531,15 +11522,6 @@
                 <a:latin typeface="Century Schoolbook"/>
               </a:rPr>
               <a:t>4/x</a:t>
-            </a:r>
-            <a:r>
-              <a:rPr sz="2400" b="0" i="0" baseline="30000">
-                <a:solidFill>
-                  <a:srgbClr val="1A1A1A"/>
-                </a:solidFill>
-                <a:latin typeface="Century Schoolbook"/>
-              </a:rPr>
-              <a:t>5</a:t>
             </a:r>
           </a:p>
         </p:txBody>

--- a/a7/build/out/u3/A7 3.T2  Slides.pptx
+++ b/a7/build/out/u3/A7 3.T2  Slides.pptx
@@ -3927,7 +3927,7 @@
         </p:nvSpPr>
         <p:spPr>
           <a:xfrm>
-            <a:off x="4858511" y="4585716"/>
+            <a:off x="4747260" y="4712208"/>
             <a:ext cx="1920240" cy="548640"/>
           </a:xfrm>
           <a:prstGeom prst="rect">
@@ -3956,7 +3956,7 @@
       </p:sp>
       <p:pic>
         <p:nvPicPr>
-          <p:cNvPr id="12" name="Picture 11" descr="0dd0202a585c5c68.png"/>
+          <p:cNvPr id="12" name="Picture 11" descr="5fcfdcd223fa6117.png"/>
           <p:cNvPicPr>
             <a:picLocks noChangeAspect="1"/>
           </p:cNvPicPr>
@@ -3970,8 +3970,8 @@
         </p:blipFill>
         <p:spPr>
           <a:xfrm>
-            <a:off x="6778751" y="4480560"/>
-            <a:ext cx="524256" cy="758952"/>
+            <a:off x="6667499" y="4480560"/>
+            <a:ext cx="746760" cy="1011936"/>
           </a:xfrm>
           <a:prstGeom prst="rect">
             <a:avLst/>
@@ -4243,7 +4243,7 @@
       </p:sp>
       <p:pic>
         <p:nvPicPr>
-          <p:cNvPr id="9" name="Picture 8" descr="71ad78b318f899a9.png"/>
+          <p:cNvPr id="9" name="Picture 8" descr="061639b8c49f6a31.png"/>
           <p:cNvPicPr>
             <a:picLocks noChangeAspect="1"/>
           </p:cNvPicPr>
@@ -4257,8 +4257,8 @@
         </p:blipFill>
         <p:spPr>
           <a:xfrm>
-            <a:off x="5535167" y="2103120"/>
-            <a:ext cx="1091184" cy="600456"/>
+            <a:off x="5372099" y="2103120"/>
+            <a:ext cx="1417320" cy="807720"/>
           </a:xfrm>
           <a:prstGeom prst="rect">
             <a:avLst/>
@@ -4273,7 +4273,7 @@
         </p:nvSpPr>
         <p:spPr>
           <a:xfrm>
-            <a:off x="777240" y="3206496"/>
+            <a:off x="777240" y="3413760"/>
             <a:ext cx="10607040" cy="429370"/>
           </a:xfrm>
           <a:prstGeom prst="rect">
@@ -4565,7 +4565,7 @@
       </p:sp>
       <p:pic>
         <p:nvPicPr>
-          <p:cNvPr id="9" name="Picture 8" descr="2a48cb8d3da1193f.png"/>
+          <p:cNvPr id="9" name="Picture 8" descr="50895fac28ab58c6.png"/>
           <p:cNvPicPr>
             <a:picLocks noChangeAspect="1"/>
           </p:cNvPicPr>
@@ -4580,7 +4580,7 @@
         <p:spPr>
           <a:xfrm>
             <a:off x="1828800" y="1920240"/>
-            <a:ext cx="2307336" cy="609600"/>
+            <a:ext cx="2971800" cy="816864"/>
           </a:xfrm>
           <a:prstGeom prst="rect">
             <a:avLst/>
@@ -4595,8 +4595,8 @@
         </p:nvSpPr>
         <p:spPr>
           <a:xfrm>
-            <a:off x="4593336" y="1996440"/>
-            <a:ext cx="6400800" cy="502920"/>
+            <a:off x="5257800" y="2100072"/>
+            <a:ext cx="6126479" cy="502920"/>
           </a:xfrm>
           <a:prstGeom prst="rect">
             <a:avLst/>
@@ -4651,7 +4651,7 @@
       </p:sp>
       <p:pic>
         <p:nvPicPr>
-          <p:cNvPr id="11" name="Picture 10" descr="90b862fc293b5531.png"/>
+          <p:cNvPr id="11" name="Picture 10" descr="2620027e86f81ef9.png"/>
           <p:cNvPicPr>
             <a:picLocks noChangeAspect="1"/>
           </p:cNvPicPr>
@@ -4665,8 +4665,8 @@
         </p:blipFill>
         <p:spPr>
           <a:xfrm>
-            <a:off x="1828800" y="2804160"/>
-            <a:ext cx="1082040" cy="606552"/>
+            <a:off x="1828800" y="3011423"/>
+            <a:ext cx="1408176" cy="807720"/>
           </a:xfrm>
           <a:prstGeom prst="rect">
             <a:avLst/>
@@ -4681,7 +4681,7 @@
         </p:nvSpPr>
         <p:spPr>
           <a:xfrm>
-            <a:off x="3368040" y="2878835"/>
+            <a:off x="3694176" y="3186683"/>
             <a:ext cx="6400800" cy="502920"/>
           </a:xfrm>
           <a:prstGeom prst="rect">
@@ -5089,7 +5089,7 @@
       </p:sp>
       <p:pic>
         <p:nvPicPr>
-          <p:cNvPr id="9" name="Picture 8" descr="0e364db61a9bd155.png"/>
+          <p:cNvPr id="9" name="Picture 8" descr="c42f4571630d5047.png"/>
           <p:cNvPicPr>
             <a:picLocks noChangeAspect="1"/>
           </p:cNvPicPr>
@@ -5103,8 +5103,8 @@
         </p:blipFill>
         <p:spPr>
           <a:xfrm>
-            <a:off x="5398007" y="2194560"/>
-            <a:ext cx="1365504" cy="826008"/>
+            <a:off x="5193792" y="2194560"/>
+            <a:ext cx="1773936" cy="1112520"/>
           </a:xfrm>
           <a:prstGeom prst="rect">
             <a:avLst/>
@@ -5376,7 +5376,7 @@
       </p:sp>
       <p:pic>
         <p:nvPicPr>
-          <p:cNvPr id="9" name="Picture 8" descr="0e364db61a9bd155.png"/>
+          <p:cNvPr id="9" name="Picture 8" descr="c42f4571630d5047.png"/>
           <p:cNvPicPr>
             <a:picLocks noChangeAspect="1"/>
           </p:cNvPicPr>
@@ -5390,8 +5390,8 @@
         </p:blipFill>
         <p:spPr>
           <a:xfrm>
-            <a:off x="5398007" y="2194560"/>
-            <a:ext cx="1365504" cy="826008"/>
+            <a:off x="5193792" y="2194560"/>
+            <a:ext cx="1773936" cy="1112520"/>
           </a:xfrm>
           <a:prstGeom prst="rect">
             <a:avLst/>
@@ -5406,7 +5406,7 @@
         </p:nvSpPr>
         <p:spPr>
           <a:xfrm>
-            <a:off x="777240" y="3340608"/>
+            <a:off x="777240" y="3627119"/>
             <a:ext cx="10607040" cy="429370"/>
           </a:xfrm>
           <a:prstGeom prst="rect">
@@ -5477,7 +5477,7 @@
         </p:nvSpPr>
         <p:spPr>
           <a:xfrm>
-            <a:off x="4791455" y="4594860"/>
+            <a:off x="4652772" y="4725924"/>
             <a:ext cx="1920240" cy="548640"/>
           </a:xfrm>
           <a:prstGeom prst="rect">
@@ -5506,7 +5506,7 @@
       </p:sp>
       <p:pic>
         <p:nvPicPr>
-          <p:cNvPr id="12" name="Picture 11" descr="f417f826d00b018c.png"/>
+          <p:cNvPr id="12" name="Picture 11" descr="3636f909b16359db.png"/>
           <p:cNvPicPr>
             <a:picLocks noChangeAspect="1"/>
           </p:cNvPicPr>
@@ -5520,8 +5520,8 @@
         </p:blipFill>
         <p:spPr>
           <a:xfrm>
-            <a:off x="6711696" y="4480560"/>
-            <a:ext cx="658368" cy="777240"/>
+            <a:off x="6573011" y="4480560"/>
+            <a:ext cx="935736" cy="1039368"/>
           </a:xfrm>
           <a:prstGeom prst="rect">
             <a:avLst/>
@@ -6224,7 +6224,7 @@
         </p:nvSpPr>
         <p:spPr>
           <a:xfrm>
-            <a:off x="4951476" y="4739639"/>
+            <a:off x="4881372" y="4853939"/>
             <a:ext cx="1920240" cy="548640"/>
           </a:xfrm>
           <a:prstGeom prst="rect">
@@ -6253,7 +6253,7 @@
       </p:sp>
       <p:pic>
         <p:nvPicPr>
-          <p:cNvPr id="12" name="Picture 11" descr="4601c065afbed72f.png"/>
+          <p:cNvPr id="12" name="Picture 11" descr="f4033d6f9e46bb18.png"/>
           <p:cNvPicPr>
             <a:picLocks noChangeAspect="1"/>
           </p:cNvPicPr>
@@ -6267,8 +6267,8 @@
         </p:blipFill>
         <p:spPr>
           <a:xfrm>
-            <a:off x="6871716" y="4663440"/>
-            <a:ext cx="338328" cy="701040"/>
+            <a:off x="6801611" y="4663440"/>
+            <a:ext cx="478536" cy="929640"/>
           </a:xfrm>
           <a:prstGeom prst="rect">
             <a:avLst/>
@@ -6540,7 +6540,7 @@
       </p:sp>
       <p:pic>
         <p:nvPicPr>
-          <p:cNvPr id="9" name="Picture 8" descr="4904bc540851661c.png"/>
+          <p:cNvPr id="9" name="Picture 8" descr="70a7739fb7946438.png"/>
           <p:cNvPicPr>
             <a:picLocks noChangeAspect="1"/>
           </p:cNvPicPr>
@@ -6554,8 +6554,8 @@
         </p:blipFill>
         <p:spPr>
           <a:xfrm>
-            <a:off x="5827776" y="2194560"/>
-            <a:ext cx="505968" cy="777240"/>
+            <a:off x="5722620" y="2194560"/>
+            <a:ext cx="716280" cy="1036320"/>
           </a:xfrm>
           <a:prstGeom prst="rect">
             <a:avLst/>
@@ -6897,7 +6897,7 @@
       </p:sp>
       <p:pic>
         <p:nvPicPr>
-          <p:cNvPr id="9" name="Picture 8" descr="4904bc540851661c.png"/>
+          <p:cNvPr id="9" name="Picture 8" descr="70a7739fb7946438.png"/>
           <p:cNvPicPr>
             <a:picLocks noChangeAspect="1"/>
           </p:cNvPicPr>
@@ -6911,8 +6911,8 @@
         </p:blipFill>
         <p:spPr>
           <a:xfrm>
-            <a:off x="5827776" y="2103120"/>
-            <a:ext cx="505968" cy="777240"/>
+            <a:off x="5722620" y="2103120"/>
+            <a:ext cx="716280" cy="1036320"/>
           </a:xfrm>
           <a:prstGeom prst="rect">
             <a:avLst/>
@@ -6927,7 +6927,7 @@
         </p:nvSpPr>
         <p:spPr>
           <a:xfrm>
-            <a:off x="1828800" y="3154679"/>
+            <a:off x="1828800" y="3413759"/>
             <a:ext cx="8503920" cy="548640"/>
           </a:xfrm>
           <a:prstGeom prst="rect">
@@ -7284,8 +7284,8 @@
         </p:nvSpPr>
         <p:spPr>
           <a:xfrm>
-            <a:off x="3241040" y="2171700"/>
-            <a:ext cx="4846320" cy="457200"/>
+            <a:off x="3575481" y="2171700"/>
+            <a:ext cx="4251856" cy="457200"/>
           </a:xfrm>
           <a:prstGeom prst="rect">
             <a:avLst/>
@@ -7294,7 +7294,7 @@
         </p:spPr>
         <p:txBody>
           <a:bodyPr wrap="none" lIns="45720" rIns="45720" tIns="18288" bIns="18288" anchor="ctr">
-            <a:spAutoFit/>
+            <a:noAutofit/>
           </a:bodyPr>
           <a:lstStyle/>
           <a:p>
@@ -7327,7 +7327,7 @@
         </p:blipFill>
         <p:spPr>
           <a:xfrm>
-            <a:off x="7950200" y="2229612"/>
+            <a:off x="7690178" y="2229612"/>
             <a:ext cx="725424" cy="341376"/>
           </a:xfrm>
           <a:prstGeom prst="rect">
@@ -7343,8 +7343,8 @@
         </p:nvSpPr>
         <p:spPr>
           <a:xfrm>
-            <a:off x="8675624" y="2171700"/>
-            <a:ext cx="382016" cy="457200"/>
+            <a:off x="8415602" y="2171700"/>
+            <a:ext cx="307595" cy="457200"/>
           </a:xfrm>
           <a:prstGeom prst="rect">
             <a:avLst/>
@@ -7353,7 +7353,7 @@
         </p:spPr>
         <p:txBody>
           <a:bodyPr wrap="none" lIns="45720" rIns="45720" tIns="18288" bIns="18288" anchor="ctr">
-            <a:spAutoFit/>
+            <a:noAutofit/>
           </a:bodyPr>
           <a:lstStyle/>
           <a:p>
@@ -7782,7 +7782,7 @@
         <p:spPr>
           <a:xfrm>
             <a:off x="1874519" y="1760220"/>
-            <a:ext cx="5374640" cy="457200"/>
+            <a:ext cx="4874632" cy="457200"/>
           </a:xfrm>
           <a:prstGeom prst="rect">
             <a:avLst/>
@@ -7791,7 +7791,7 @@
         </p:spPr>
         <p:txBody>
           <a:bodyPr wrap="none" lIns="45720" rIns="45720" tIns="18288" bIns="18288" anchor="ctr">
-            <a:spAutoFit/>
+            <a:noAutofit/>
           </a:bodyPr>
           <a:lstStyle/>
           <a:p>
@@ -7824,7 +7824,7 @@
         </p:blipFill>
         <p:spPr>
           <a:xfrm>
-            <a:off x="7112000" y="1821180"/>
+            <a:off x="6611992" y="1821180"/>
             <a:ext cx="771144" cy="335280"/>
           </a:xfrm>
           <a:prstGeom prst="rect">
@@ -7841,7 +7841,7 @@
         <p:spPr>
           <a:xfrm>
             <a:off x="1874519" y="2372868"/>
-            <a:ext cx="3551936" cy="457200"/>
+            <a:ext cx="3064939" cy="457200"/>
           </a:xfrm>
           <a:prstGeom prst="rect">
             <a:avLst/>
@@ -7850,7 +7850,7 @@
         </p:spPr>
         <p:txBody>
           <a:bodyPr wrap="none" lIns="45720" rIns="45720" tIns="18288" bIns="18288" anchor="ctr">
-            <a:spAutoFit/>
+            <a:noAutofit/>
           </a:bodyPr>
           <a:lstStyle/>
           <a:p>
@@ -7883,7 +7883,7 @@
         </p:blipFill>
         <p:spPr>
           <a:xfrm>
-            <a:off x="5289296" y="2461260"/>
+            <a:off x="4802299" y="2461260"/>
             <a:ext cx="426720" cy="280416"/>
           </a:xfrm>
           <a:prstGeom prst="rect">
@@ -7900,7 +7900,7 @@
         <p:spPr>
           <a:xfrm>
             <a:off x="1874519" y="2985516"/>
-            <a:ext cx="3855720" cy="457200"/>
+            <a:ext cx="3341646" cy="457200"/>
           </a:xfrm>
           <a:prstGeom prst="rect">
             <a:avLst/>
@@ -7909,7 +7909,7 @@
         </p:spPr>
         <p:txBody>
           <a:bodyPr wrap="none" lIns="45720" rIns="45720" tIns="18288" bIns="18288" anchor="ctr">
-            <a:spAutoFit/>
+            <a:noAutofit/>
           </a:bodyPr>
           <a:lstStyle/>
           <a:p>
@@ -7942,7 +7942,7 @@
         </p:blipFill>
         <p:spPr>
           <a:xfrm>
-            <a:off x="5593080" y="3009900"/>
+            <a:off x="5079006" y="3009900"/>
             <a:ext cx="688848" cy="408432"/>
           </a:xfrm>
           <a:prstGeom prst="rect">
@@ -7958,8 +7958,8 @@
         </p:nvSpPr>
         <p:spPr>
           <a:xfrm>
-            <a:off x="6281927" y="2985516"/>
-            <a:ext cx="1425448" cy="457200"/>
+            <a:off x="5767854" y="2985516"/>
+            <a:ext cx="1156543" cy="457200"/>
           </a:xfrm>
           <a:prstGeom prst="rect">
             <a:avLst/>
@@ -7968,7 +7968,7 @@
         </p:spPr>
         <p:txBody>
           <a:bodyPr wrap="none" lIns="45720" rIns="45720" tIns="18288" bIns="18288" anchor="ctr">
-            <a:spAutoFit/>
+            <a:noAutofit/>
           </a:bodyPr>
           <a:lstStyle/>
           <a:p>
@@ -7993,8 +7993,8 @@
         </p:nvSpPr>
         <p:spPr>
           <a:xfrm>
-            <a:off x="1874519" y="3601212"/>
-            <a:ext cx="5070856" cy="457200"/>
+            <a:off x="1874519" y="3668268"/>
+            <a:ext cx="4395048" cy="457200"/>
           </a:xfrm>
           <a:prstGeom prst="rect">
             <a:avLst/>
@@ -8003,7 +8003,7 @@
         </p:spPr>
         <p:txBody>
           <a:bodyPr wrap="none" lIns="45720" rIns="45720" tIns="18288" bIns="18288" anchor="ctr">
-            <a:spAutoFit/>
+            <a:noAutofit/>
           </a:bodyPr>
           <a:lstStyle/>
           <a:p>
@@ -8022,7 +8022,7 @@
       </p:sp>
       <p:pic>
         <p:nvPicPr>
-          <p:cNvPr id="17" name="Picture 16" descr="0c7f91282138ecd7.png"/>
+          <p:cNvPr id="17" name="Picture 16" descr="e8022fa09c25c018.png"/>
           <p:cNvPicPr>
             <a:picLocks noChangeAspect="1"/>
           </p:cNvPicPr>
@@ -8036,8 +8036,8 @@
         </p:blipFill>
         <p:spPr>
           <a:xfrm>
-            <a:off x="6808215" y="3621024"/>
-            <a:ext cx="118872" cy="417576"/>
+            <a:off x="6132408" y="3621024"/>
+            <a:ext cx="170688" cy="551688"/>
           </a:xfrm>
           <a:prstGeom prst="rect">
             <a:avLst/>
@@ -8052,8 +8052,8 @@
         </p:nvSpPr>
         <p:spPr>
           <a:xfrm>
-            <a:off x="6927087" y="3601212"/>
-            <a:ext cx="514095" cy="457200"/>
+            <a:off x="6303096" y="3668268"/>
+            <a:ext cx="433854" cy="457200"/>
           </a:xfrm>
           <a:prstGeom prst="rect">
             <a:avLst/>
@@ -8062,7 +8062,7 @@
         </p:spPr>
         <p:txBody>
           <a:bodyPr wrap="none" lIns="45720" rIns="45720" tIns="18288" bIns="18288" anchor="ctr">
-            <a:spAutoFit/>
+            <a:noAutofit/>
           </a:bodyPr>
           <a:lstStyle/>
           <a:p>
@@ -8350,8 +8350,8 @@
         </p:nvSpPr>
         <p:spPr>
           <a:xfrm>
-            <a:off x="3241040" y="2080260"/>
-            <a:ext cx="4846320" cy="457200"/>
+            <a:off x="3575481" y="2080260"/>
+            <a:ext cx="4251856" cy="457200"/>
           </a:xfrm>
           <a:prstGeom prst="rect">
             <a:avLst/>
@@ -8360,7 +8360,7 @@
         </p:spPr>
         <p:txBody>
           <a:bodyPr wrap="none" lIns="45720" rIns="45720" tIns="18288" bIns="18288" anchor="ctr">
-            <a:spAutoFit/>
+            <a:noAutofit/>
           </a:bodyPr>
           <a:lstStyle/>
           <a:p>
@@ -8393,7 +8393,7 @@
         </p:blipFill>
         <p:spPr>
           <a:xfrm>
-            <a:off x="7950200" y="2138171"/>
+            <a:off x="7690178" y="2138171"/>
             <a:ext cx="725424" cy="341376"/>
           </a:xfrm>
           <a:prstGeom prst="rect">
@@ -8409,8 +8409,8 @@
         </p:nvSpPr>
         <p:spPr>
           <a:xfrm>
-            <a:off x="8675624" y="2080260"/>
-            <a:ext cx="382016" cy="457200"/>
+            <a:off x="8415602" y="2080260"/>
+            <a:ext cx="307595" cy="457200"/>
           </a:xfrm>
           <a:prstGeom prst="rect">
             <a:avLst/>
@@ -8419,7 +8419,7 @@
         </p:spPr>
         <p:txBody>
           <a:bodyPr wrap="none" lIns="45720" rIns="45720" tIns="18288" bIns="18288" anchor="ctr">
-            <a:spAutoFit/>
+            <a:noAutofit/>
           </a:bodyPr>
           <a:lstStyle/>
           <a:p>
@@ -8549,7 +8549,7 @@
         </p:nvSpPr>
         <p:spPr>
           <a:xfrm>
-            <a:off x="4951476" y="4792118"/>
+            <a:off x="4881372" y="4907942"/>
             <a:ext cx="1920240" cy="548640"/>
           </a:xfrm>
           <a:prstGeom prst="rect">
@@ -8578,7 +8578,7 @@
       </p:sp>
       <p:pic>
         <p:nvPicPr>
-          <p:cNvPr id="16" name="Picture 15" descr="3dda12ba15c79c04.png"/>
+          <p:cNvPr id="16" name="Picture 15" descr="71f960ddecd24b62.png"/>
           <p:cNvPicPr>
             <a:picLocks noChangeAspect="1"/>
           </p:cNvPicPr>
@@ -8592,8 +8592,8 @@
         </p:blipFill>
         <p:spPr>
           <a:xfrm>
-            <a:off x="6871716" y="4715918"/>
-            <a:ext cx="338328" cy="701040"/>
+            <a:off x="6801611" y="4715918"/>
+            <a:ext cx="478536" cy="932688"/>
           </a:xfrm>
           <a:prstGeom prst="rect">
             <a:avLst/>
@@ -9287,7 +9287,7 @@
         </p:nvSpPr>
         <p:spPr>
           <a:xfrm>
-            <a:off x="4802123" y="4774692"/>
+            <a:off x="4669536" y="4904232"/>
             <a:ext cx="1920240" cy="548640"/>
           </a:xfrm>
           <a:prstGeom prst="rect">
@@ -9316,7 +9316,7 @@
       </p:sp>
       <p:pic>
         <p:nvPicPr>
-          <p:cNvPr id="12" name="Picture 11" descr="46cdd5e9c452dd9c.png"/>
+          <p:cNvPr id="12" name="Picture 11" descr="f532a74f60c6ce26.png"/>
           <p:cNvPicPr>
             <a:picLocks noChangeAspect="1"/>
           </p:cNvPicPr>
@@ -9330,8 +9330,8 @@
         </p:blipFill>
         <p:spPr>
           <a:xfrm>
-            <a:off x="6722364" y="4663440"/>
-            <a:ext cx="637032" cy="771144"/>
+            <a:off x="6589776" y="4663440"/>
+            <a:ext cx="902208" cy="1030224"/>
           </a:xfrm>
           <a:prstGeom prst="rect">
             <a:avLst/>
@@ -11897,7 +11897,7 @@
       </p:sp>
       <p:pic>
         <p:nvPicPr>
-          <p:cNvPr id="9" name="Picture 8" descr="862f170bfccaf528.png"/>
+          <p:cNvPr id="9" name="Picture 8" descr="61aec65184b6beb1.png"/>
           <p:cNvPicPr>
             <a:picLocks noChangeAspect="1"/>
           </p:cNvPicPr>
@@ -11911,8 +11911,8 @@
         </p:blipFill>
         <p:spPr>
           <a:xfrm>
-            <a:off x="5868924" y="2194560"/>
-            <a:ext cx="423672" cy="752856"/>
+            <a:off x="5779007" y="2194560"/>
+            <a:ext cx="603504" cy="1005840"/>
           </a:xfrm>
           <a:prstGeom prst="rect">
             <a:avLst/>
@@ -12254,7 +12254,7 @@
       </p:sp>
       <p:pic>
         <p:nvPicPr>
-          <p:cNvPr id="9" name="Picture 8" descr="862f170bfccaf528.png"/>
+          <p:cNvPr id="9" name="Picture 8" descr="61aec65184b6beb1.png"/>
           <p:cNvPicPr>
             <a:picLocks noChangeAspect="1"/>
           </p:cNvPicPr>
@@ -12268,8 +12268,8 @@
         </p:blipFill>
         <p:spPr>
           <a:xfrm>
-            <a:off x="5868924" y="2103120"/>
-            <a:ext cx="423672" cy="752856"/>
+            <a:off x="5779007" y="2103120"/>
+            <a:ext cx="603504" cy="1005840"/>
           </a:xfrm>
           <a:prstGeom prst="rect">
             <a:avLst/>
@@ -12284,7 +12284,7 @@
         </p:nvSpPr>
         <p:spPr>
           <a:xfrm>
-            <a:off x="1828800" y="3130295"/>
+            <a:off x="1828800" y="3383279"/>
             <a:ext cx="8503920" cy="548640"/>
           </a:xfrm>
           <a:prstGeom prst="rect">
@@ -12337,7 +12337,7 @@
         </p:nvSpPr>
         <p:spPr>
           <a:xfrm>
-            <a:off x="4908804" y="4739639"/>
+            <a:off x="4818888" y="4855464"/>
             <a:ext cx="1920240" cy="548640"/>
           </a:xfrm>
           <a:prstGeom prst="rect">
@@ -12366,7 +12366,7 @@
       </p:sp>
       <p:pic>
         <p:nvPicPr>
-          <p:cNvPr id="12" name="Picture 11" descr="3b3e5b771f16564b.png"/>
+          <p:cNvPr id="12" name="Picture 11" descr="a74f00062d590b9f.png"/>
           <p:cNvPicPr>
             <a:picLocks noChangeAspect="1"/>
           </p:cNvPicPr>
@@ -12380,8 +12380,8 @@
         </p:blipFill>
         <p:spPr>
           <a:xfrm>
-            <a:off x="6829044" y="4663440"/>
-            <a:ext cx="423672" cy="701040"/>
+            <a:off x="6739127" y="4663440"/>
+            <a:ext cx="603504" cy="932688"/>
           </a:xfrm>
           <a:prstGeom prst="rect">
             <a:avLst/>
@@ -12659,8 +12659,8 @@
         </p:nvSpPr>
         <p:spPr>
           <a:xfrm>
-            <a:off x="4280408" y="2171700"/>
-            <a:ext cx="3300984" cy="457200"/>
+            <a:off x="4444343" y="2171700"/>
+            <a:ext cx="3047533" cy="457200"/>
           </a:xfrm>
           <a:prstGeom prst="rect">
             <a:avLst/>
@@ -12669,7 +12669,7 @@
         </p:spPr>
         <p:txBody>
           <a:bodyPr wrap="none" lIns="45720" rIns="45720" tIns="18288" bIns="18288" anchor="ctr">
-            <a:spAutoFit/>
+            <a:noAutofit/>
           </a:bodyPr>
           <a:lstStyle/>
           <a:p>
@@ -12702,7 +12702,7 @@
         </p:blipFill>
         <p:spPr>
           <a:xfrm>
-            <a:off x="7444232" y="2308860"/>
+            <a:off x="7354716" y="2308860"/>
             <a:ext cx="192024" cy="182880"/>
           </a:xfrm>
           <a:prstGeom prst="rect">
@@ -12718,8 +12718,8 @@
         </p:nvSpPr>
         <p:spPr>
           <a:xfrm>
-            <a:off x="7636256" y="2171700"/>
-            <a:ext cx="382016" cy="457200"/>
+            <a:off x="7546740" y="2171700"/>
+            <a:ext cx="307595" cy="457200"/>
           </a:xfrm>
           <a:prstGeom prst="rect">
             <a:avLst/>
@@ -12728,7 +12728,7 @@
         </p:spPr>
         <p:txBody>
           <a:bodyPr wrap="none" lIns="45720" rIns="45720" tIns="18288" bIns="18288" anchor="ctr">
-            <a:spAutoFit/>
+            <a:noAutofit/>
           </a:bodyPr>
           <a:lstStyle/>
           <a:p>
@@ -13111,7 +13111,7 @@
         <p:spPr>
           <a:xfrm>
             <a:off x="1874519" y="1760220"/>
-            <a:ext cx="5374640" cy="457200"/>
+            <a:ext cx="4874632" cy="457200"/>
           </a:xfrm>
           <a:prstGeom prst="rect">
             <a:avLst/>
@@ -13120,7 +13120,7 @@
         </p:spPr>
         <p:txBody>
           <a:bodyPr wrap="none" lIns="45720" rIns="45720" tIns="18288" bIns="18288" anchor="ctr">
-            <a:spAutoFit/>
+            <a:noAutofit/>
           </a:bodyPr>
           <a:lstStyle/>
           <a:p>
@@ -13153,7 +13153,7 @@
         </p:blipFill>
         <p:spPr>
           <a:xfrm>
-            <a:off x="7112000" y="1821180"/>
+            <a:off x="6611992" y="1821180"/>
             <a:ext cx="771144" cy="335280"/>
           </a:xfrm>
           <a:prstGeom prst="rect">
@@ -13169,8 +13169,8 @@
         </p:nvSpPr>
         <p:spPr>
           <a:xfrm>
-            <a:off x="8431784" y="1760220"/>
-            <a:ext cx="887983" cy="457200"/>
+            <a:off x="7931776" y="1760220"/>
+            <a:ext cx="841711" cy="457200"/>
           </a:xfrm>
           <a:prstGeom prst="rect">
             <a:avLst/>
@@ -13179,7 +13179,7 @@
         </p:spPr>
         <p:txBody>
           <a:bodyPr wrap="none" lIns="45720" rIns="45720" tIns="18288" bIns="18288" anchor="ctr">
-            <a:spAutoFit/>
+            <a:noAutofit/>
           </a:bodyPr>
           <a:lstStyle/>
           <a:p>
@@ -13214,7 +13214,7 @@
         <p:spPr>
           <a:xfrm>
             <a:off x="1874519" y="2372868"/>
-            <a:ext cx="3551936" cy="457200"/>
+            <a:ext cx="3064939" cy="457200"/>
           </a:xfrm>
           <a:prstGeom prst="rect">
             <a:avLst/>
@@ -13223,7 +13223,7 @@
         </p:spPr>
         <p:txBody>
           <a:bodyPr wrap="none" lIns="45720" rIns="45720" tIns="18288" bIns="18288" anchor="ctr">
-            <a:spAutoFit/>
+            <a:noAutofit/>
           </a:bodyPr>
           <a:lstStyle/>
           <a:p>
@@ -13256,7 +13256,7 @@
         </p:blipFill>
         <p:spPr>
           <a:xfrm>
-            <a:off x="5289296" y="2461260"/>
+            <a:off x="4802299" y="2461260"/>
             <a:ext cx="426720" cy="280416"/>
           </a:xfrm>
           <a:prstGeom prst="rect">
@@ -13272,8 +13272,8 @@
         </p:nvSpPr>
         <p:spPr>
           <a:xfrm>
-            <a:off x="6264656" y="2372868"/>
-            <a:ext cx="887983" cy="457200"/>
+            <a:off x="5777659" y="2372868"/>
+            <a:ext cx="829616" cy="457200"/>
           </a:xfrm>
           <a:prstGeom prst="rect">
             <a:avLst/>
@@ -13282,7 +13282,7 @@
         </p:spPr>
         <p:txBody>
           <a:bodyPr wrap="none" lIns="45720" rIns="45720" tIns="18288" bIns="18288" anchor="ctr">
-            <a:spAutoFit/>
+            <a:noAutofit/>
           </a:bodyPr>
           <a:lstStyle/>
           <a:p>
@@ -13308,7 +13308,7 @@
         <p:spPr>
           <a:xfrm>
             <a:off x="1874519" y="2985516"/>
-            <a:ext cx="3855720" cy="457200"/>
+            <a:ext cx="3341646" cy="457200"/>
           </a:xfrm>
           <a:prstGeom prst="rect">
             <a:avLst/>
@@ -13317,7 +13317,7 @@
         </p:spPr>
         <p:txBody>
           <a:bodyPr wrap="none" lIns="45720" rIns="45720" tIns="18288" bIns="18288" anchor="ctr">
-            <a:spAutoFit/>
+            <a:noAutofit/>
           </a:bodyPr>
           <a:lstStyle/>
           <a:p>
@@ -13350,7 +13350,7 @@
         </p:blipFill>
         <p:spPr>
           <a:xfrm>
-            <a:off x="5593080" y="3009900"/>
+            <a:off x="5079006" y="3009900"/>
             <a:ext cx="688848" cy="408432"/>
           </a:xfrm>
           <a:prstGeom prst="rect">
@@ -13366,8 +13366,8 @@
         </p:nvSpPr>
         <p:spPr>
           <a:xfrm>
-            <a:off x="6281927" y="2985516"/>
-            <a:ext cx="1425448" cy="457200"/>
+            <a:off x="5767854" y="2985516"/>
+            <a:ext cx="1156543" cy="457200"/>
           </a:xfrm>
           <a:prstGeom prst="rect">
             <a:avLst/>
@@ -13376,7 +13376,7 @@
         </p:spPr>
         <p:txBody>
           <a:bodyPr wrap="none" lIns="45720" rIns="45720" tIns="18288" bIns="18288" anchor="ctr">
-            <a:spAutoFit/>
+            <a:noAutofit/>
           </a:bodyPr>
           <a:lstStyle/>
           <a:p>
@@ -13401,8 +13401,8 @@
         </p:nvSpPr>
         <p:spPr>
           <a:xfrm>
-            <a:off x="8118855" y="2985516"/>
-            <a:ext cx="379729" cy="457200"/>
+            <a:off x="7335878" y="2985516"/>
+            <a:ext cx="388052" cy="457200"/>
           </a:xfrm>
           <a:prstGeom prst="rect">
             <a:avLst/>
@@ -13411,7 +13411,7 @@
         </p:spPr>
         <p:txBody>
           <a:bodyPr wrap="none" lIns="45720" rIns="45720" tIns="18288" bIns="18288" anchor="ctr">
-            <a:spAutoFit/>
+            <a:noAutofit/>
           </a:bodyPr>
           <a:lstStyle/>
           <a:p>
@@ -13436,8 +13436,8 @@
         </p:nvSpPr>
         <p:spPr>
           <a:xfrm>
-            <a:off x="1874519" y="3601212"/>
-            <a:ext cx="5070856" cy="457200"/>
+            <a:off x="1874519" y="3668268"/>
+            <a:ext cx="4395048" cy="457200"/>
           </a:xfrm>
           <a:prstGeom prst="rect">
             <a:avLst/>
@@ -13446,7 +13446,7 @@
         </p:spPr>
         <p:txBody>
           <a:bodyPr wrap="none" lIns="45720" rIns="45720" tIns="18288" bIns="18288" anchor="ctr">
-            <a:spAutoFit/>
+            <a:noAutofit/>
           </a:bodyPr>
           <a:lstStyle/>
           <a:p>
@@ -13465,7 +13465,7 @@
       </p:sp>
       <p:pic>
         <p:nvPicPr>
-          <p:cNvPr id="20" name="Picture 19" descr="0c7f91282138ecd7.png"/>
+          <p:cNvPr id="20" name="Picture 19" descr="e8022fa09c25c018.png"/>
           <p:cNvPicPr>
             <a:picLocks noChangeAspect="1"/>
           </p:cNvPicPr>
@@ -13479,8 +13479,8 @@
         </p:blipFill>
         <p:spPr>
           <a:xfrm>
-            <a:off x="6808215" y="3621024"/>
-            <a:ext cx="118872" cy="417576"/>
+            <a:off x="6132408" y="3621024"/>
+            <a:ext cx="170688" cy="551688"/>
           </a:xfrm>
           <a:prstGeom prst="rect">
             <a:avLst/>
@@ -13495,8 +13495,8 @@
         </p:nvSpPr>
         <p:spPr>
           <a:xfrm>
-            <a:off x="6927087" y="3601212"/>
-            <a:ext cx="514095" cy="457200"/>
+            <a:off x="6303096" y="3668268"/>
+            <a:ext cx="433854" cy="457200"/>
           </a:xfrm>
           <a:prstGeom prst="rect">
             <a:avLst/>
@@ -13505,7 +13505,7 @@
         </p:spPr>
         <p:txBody>
           <a:bodyPr wrap="none" lIns="45720" rIns="45720" tIns="18288" bIns="18288" anchor="ctr">
-            <a:spAutoFit/>
+            <a:noAutofit/>
           </a:bodyPr>
           <a:lstStyle/>
           <a:p>
@@ -13524,7 +13524,7 @@
       </p:sp>
       <p:pic>
         <p:nvPicPr>
-          <p:cNvPr id="22" name="Picture 21" descr="5de87a3bb1502466.png"/>
+          <p:cNvPr id="22" name="Picture 21" descr="0ea9c861f6451dd4.png"/>
           <p:cNvPicPr>
             <a:picLocks noChangeAspect="1"/>
           </p:cNvPicPr>
@@ -13538,8 +13538,8 @@
         </p:blipFill>
         <p:spPr>
           <a:xfrm>
-            <a:off x="7852664" y="3621024"/>
-            <a:ext cx="118872" cy="420624"/>
+            <a:off x="7148431" y="3621024"/>
+            <a:ext cx="170688" cy="551688"/>
           </a:xfrm>
           <a:prstGeom prst="rect">
             <a:avLst/>
@@ -13817,8 +13817,8 @@
         </p:nvSpPr>
         <p:spPr>
           <a:xfrm>
-            <a:off x="4280408" y="2080260"/>
-            <a:ext cx="3300984" cy="457200"/>
+            <a:off x="4444343" y="2080260"/>
+            <a:ext cx="3047533" cy="457200"/>
           </a:xfrm>
           <a:prstGeom prst="rect">
             <a:avLst/>
@@ -13827,7 +13827,7 @@
         </p:spPr>
         <p:txBody>
           <a:bodyPr wrap="none" lIns="45720" rIns="45720" tIns="18288" bIns="18288" anchor="ctr">
-            <a:spAutoFit/>
+            <a:noAutofit/>
           </a:bodyPr>
           <a:lstStyle/>
           <a:p>
@@ -13860,7 +13860,7 @@
         </p:blipFill>
         <p:spPr>
           <a:xfrm>
-            <a:off x="7444232" y="2217420"/>
+            <a:off x="7354716" y="2217420"/>
             <a:ext cx="192024" cy="182880"/>
           </a:xfrm>
           <a:prstGeom prst="rect">
@@ -13876,8 +13876,8 @@
         </p:nvSpPr>
         <p:spPr>
           <a:xfrm>
-            <a:off x="7636256" y="2080260"/>
-            <a:ext cx="382016" cy="457200"/>
+            <a:off x="7546740" y="2080260"/>
+            <a:ext cx="307595" cy="457200"/>
           </a:xfrm>
           <a:prstGeom prst="rect">
             <a:avLst/>
@@ -13886,7 +13886,7 @@
         </p:spPr>
         <p:txBody>
           <a:bodyPr wrap="none" lIns="45720" rIns="45720" tIns="18288" bIns="18288" anchor="ctr">
-            <a:spAutoFit/>
+            <a:noAutofit/>
           </a:bodyPr>
           <a:lstStyle/>
           <a:p>
@@ -14268,8 +14268,8 @@
         </p:nvSpPr>
         <p:spPr>
           <a:xfrm>
-            <a:off x="3296920" y="2171700"/>
-            <a:ext cx="1755648" cy="457200"/>
+            <a:off x="3506774" y="2171700"/>
+            <a:ext cx="1757285" cy="457200"/>
           </a:xfrm>
           <a:prstGeom prst="rect">
             <a:avLst/>
@@ -14278,7 +14278,7 @@
         </p:spPr>
         <p:txBody>
           <a:bodyPr wrap="none" lIns="45720" rIns="45720" tIns="18288" bIns="18288" anchor="ctr">
-            <a:spAutoFit/>
+            <a:noAutofit/>
           </a:bodyPr>
           <a:lstStyle/>
           <a:p>
@@ -14311,7 +14311,7 @@
         </p:blipFill>
         <p:spPr>
           <a:xfrm>
-            <a:off x="4915408" y="2228088"/>
+            <a:off x="5126899" y="2228088"/>
             <a:ext cx="344424" cy="344424"/>
           </a:xfrm>
           <a:prstGeom prst="rect">
@@ -14327,8 +14327,8 @@
         </p:nvSpPr>
         <p:spPr>
           <a:xfrm>
-            <a:off x="5259832" y="2171700"/>
-            <a:ext cx="1412240" cy="457200"/>
+            <a:off x="5471323" y="2171700"/>
+            <a:ext cx="1208866" cy="457200"/>
           </a:xfrm>
           <a:prstGeom prst="rect">
             <a:avLst/>
@@ -14337,7 +14337,7 @@
         </p:spPr>
         <p:txBody>
           <a:bodyPr wrap="none" lIns="45720" rIns="45720" tIns="18288" bIns="18288" anchor="ctr">
-            <a:spAutoFit/>
+            <a:noAutofit/>
           </a:bodyPr>
           <a:lstStyle/>
           <a:p>
@@ -14370,7 +14370,7 @@
         </p:blipFill>
         <p:spPr>
           <a:xfrm>
-            <a:off x="6534912" y="2228088"/>
+            <a:off x="6543030" y="2228088"/>
             <a:ext cx="539496" cy="344424"/>
           </a:xfrm>
           <a:prstGeom prst="rect">
@@ -14386,8 +14386,8 @@
         </p:nvSpPr>
         <p:spPr>
           <a:xfrm>
-            <a:off x="7074408" y="2171700"/>
-            <a:ext cx="1927352" cy="457200"/>
+            <a:off x="7082526" y="2171700"/>
+            <a:ext cx="1709379" cy="457200"/>
           </a:xfrm>
           <a:prstGeom prst="rect">
             <a:avLst/>
@@ -14396,7 +14396,7 @@
         </p:spPr>
         <p:txBody>
           <a:bodyPr wrap="none" lIns="45720" rIns="45720" tIns="18288" bIns="18288" anchor="ctr">
-            <a:spAutoFit/>
+            <a:noAutofit/>
           </a:bodyPr>
           <a:lstStyle/>
           <a:p>
@@ -14421,8 +14421,8 @@
         </p:nvSpPr>
         <p:spPr>
           <a:xfrm>
-            <a:off x="1924304" y="2857500"/>
-            <a:ext cx="7421880" cy="457200"/>
+            <a:off x="2165540" y="2857500"/>
+            <a:ext cx="7013828" cy="457200"/>
           </a:xfrm>
           <a:prstGeom prst="rect">
             <a:avLst/>
@@ -14431,7 +14431,7 @@
         </p:spPr>
         <p:txBody>
           <a:bodyPr wrap="none" lIns="45720" rIns="45720" tIns="18288" bIns="18288" anchor="ctr">
-            <a:spAutoFit/>
+            <a:noAutofit/>
           </a:bodyPr>
           <a:lstStyle/>
           <a:p>
@@ -14464,7 +14464,7 @@
         </p:blipFill>
         <p:spPr>
           <a:xfrm>
-            <a:off x="9209024" y="2945892"/>
+            <a:off x="9042208" y="2945892"/>
             <a:ext cx="783336" cy="280416"/>
           </a:xfrm>
           <a:prstGeom prst="rect">
@@ -14480,8 +14480,8 @@
         </p:nvSpPr>
         <p:spPr>
           <a:xfrm>
-            <a:off x="9992360" y="2857500"/>
-            <a:ext cx="382016" cy="457200"/>
+            <a:off x="9825544" y="2857500"/>
+            <a:ext cx="307595" cy="457200"/>
           </a:xfrm>
           <a:prstGeom prst="rect">
             <a:avLst/>
@@ -14490,7 +14490,7 @@
         </p:spPr>
         <p:txBody>
           <a:bodyPr wrap="none" lIns="45720" rIns="45720" tIns="18288" bIns="18288" anchor="ctr">
-            <a:spAutoFit/>
+            <a:noAutofit/>
           </a:bodyPr>
           <a:lstStyle/>
           <a:p>
@@ -14848,8 +14848,8 @@
         </p:nvSpPr>
         <p:spPr>
           <a:xfrm>
-            <a:off x="3296920" y="2080260"/>
-            <a:ext cx="1755648" cy="457200"/>
+            <a:off x="3506774" y="2080260"/>
+            <a:ext cx="1757285" cy="457200"/>
           </a:xfrm>
           <a:prstGeom prst="rect">
             <a:avLst/>
@@ -14858,7 +14858,7 @@
         </p:spPr>
         <p:txBody>
           <a:bodyPr wrap="none" lIns="45720" rIns="45720" tIns="18288" bIns="18288" anchor="ctr">
-            <a:spAutoFit/>
+            <a:noAutofit/>
           </a:bodyPr>
           <a:lstStyle/>
           <a:p>
@@ -14891,7 +14891,7 @@
         </p:blipFill>
         <p:spPr>
           <a:xfrm>
-            <a:off x="4915408" y="2136648"/>
+            <a:off x="5126899" y="2136648"/>
             <a:ext cx="344424" cy="344424"/>
           </a:xfrm>
           <a:prstGeom prst="rect">
@@ -14907,8 +14907,8 @@
         </p:nvSpPr>
         <p:spPr>
           <a:xfrm>
-            <a:off x="5259832" y="2080260"/>
-            <a:ext cx="1412240" cy="457200"/>
+            <a:off x="5471323" y="2080260"/>
+            <a:ext cx="1208866" cy="457200"/>
           </a:xfrm>
           <a:prstGeom prst="rect">
             <a:avLst/>
@@ -14917,7 +14917,7 @@
         </p:spPr>
         <p:txBody>
           <a:bodyPr wrap="none" lIns="45720" rIns="45720" tIns="18288" bIns="18288" anchor="ctr">
-            <a:spAutoFit/>
+            <a:noAutofit/>
           </a:bodyPr>
           <a:lstStyle/>
           <a:p>
@@ -14950,7 +14950,7 @@
         </p:blipFill>
         <p:spPr>
           <a:xfrm>
-            <a:off x="6534912" y="2136648"/>
+            <a:off x="6543030" y="2136648"/>
             <a:ext cx="539496" cy="344424"/>
           </a:xfrm>
           <a:prstGeom prst="rect">
@@ -14966,8 +14966,8 @@
         </p:nvSpPr>
         <p:spPr>
           <a:xfrm>
-            <a:off x="7074408" y="2080260"/>
-            <a:ext cx="1927352" cy="457200"/>
+            <a:off x="7082526" y="2080260"/>
+            <a:ext cx="1709379" cy="457200"/>
           </a:xfrm>
           <a:prstGeom prst="rect">
             <a:avLst/>
@@ -14976,7 +14976,7 @@
         </p:spPr>
         <p:txBody>
           <a:bodyPr wrap="none" lIns="45720" rIns="45720" tIns="18288" bIns="18288" anchor="ctr">
-            <a:spAutoFit/>
+            <a:noAutofit/>
           </a:bodyPr>
           <a:lstStyle/>
           <a:p>
@@ -15001,8 +15001,8 @@
         </p:nvSpPr>
         <p:spPr>
           <a:xfrm>
-            <a:off x="1924304" y="2766060"/>
-            <a:ext cx="7421880" cy="457200"/>
+            <a:off x="2165540" y="2766060"/>
+            <a:ext cx="7013828" cy="457200"/>
           </a:xfrm>
           <a:prstGeom prst="rect">
             <a:avLst/>
@@ -15011,7 +15011,7 @@
         </p:spPr>
         <p:txBody>
           <a:bodyPr wrap="none" lIns="45720" rIns="45720" tIns="18288" bIns="18288" anchor="ctr">
-            <a:spAutoFit/>
+            <a:noAutofit/>
           </a:bodyPr>
           <a:lstStyle/>
           <a:p>
@@ -15044,7 +15044,7 @@
         </p:blipFill>
         <p:spPr>
           <a:xfrm>
-            <a:off x="9209024" y="2854452"/>
+            <a:off x="9042208" y="2854452"/>
             <a:ext cx="783336" cy="280416"/>
           </a:xfrm>
           <a:prstGeom prst="rect">
@@ -15060,8 +15060,8 @@
         </p:nvSpPr>
         <p:spPr>
           <a:xfrm>
-            <a:off x="9992360" y="2766060"/>
-            <a:ext cx="382016" cy="457200"/>
+            <a:off x="9825544" y="2766060"/>
+            <a:ext cx="307595" cy="457200"/>
           </a:xfrm>
           <a:prstGeom prst="rect">
             <a:avLst/>
@@ -15070,7 +15070,7 @@
         </p:spPr>
         <p:txBody>
           <a:bodyPr wrap="none" lIns="45720" rIns="45720" tIns="18288" bIns="18288" anchor="ctr">
-            <a:spAutoFit/>
+            <a:noAutofit/>
           </a:bodyPr>
           <a:lstStyle/>
           <a:p>
@@ -17493,7 +17493,7 @@
       </p:graphicFrame>
       <p:pic>
         <p:nvPicPr>
-          <p:cNvPr id="12" name="Picture 11" descr="cd918de8f30fd60c.png"/>
+          <p:cNvPr id="12" name="Picture 11" descr="bdde8a8975ae9591.png"/>
           <p:cNvPicPr>
             <a:picLocks noChangeAspect="1"/>
           </p:cNvPicPr>
@@ -17507,8 +17507,8 @@
         </p:blipFill>
         <p:spPr>
           <a:xfrm>
-            <a:off x="2479039" y="3337560"/>
-            <a:ext cx="1231392" cy="512064"/>
+            <a:off x="3138205" y="3337560"/>
+            <a:ext cx="1341120" cy="676656"/>
           </a:xfrm>
           <a:prstGeom prst="rect">
             <a:avLst/>
@@ -17523,8 +17523,8 @@
         </p:nvSpPr>
         <p:spPr>
           <a:xfrm>
-            <a:off x="3710432" y="3364991"/>
-            <a:ext cx="1927352" cy="457200"/>
+            <a:off x="4479325" y="3447288"/>
+            <a:ext cx="1183151" cy="457200"/>
           </a:xfrm>
           <a:prstGeom prst="rect">
             <a:avLst/>
@@ -17533,7 +17533,7 @@
         </p:spPr>
         <p:txBody>
           <a:bodyPr wrap="none" lIns="45720" rIns="45720" tIns="18288" bIns="18288" anchor="ctr">
-            <a:spAutoFit/>
+            <a:noAutofit/>
           </a:bodyPr>
           <a:lstStyle/>
           <a:p>
@@ -17552,7 +17552,7 @@
       </p:sp>
       <p:pic>
         <p:nvPicPr>
-          <p:cNvPr id="14" name="Picture 13" descr="f0548fb3bce457c5.png"/>
+          <p:cNvPr id="14" name="Picture 13" descr="c4f6df0ed7877f2a.png"/>
           <p:cNvPicPr>
             <a:picLocks noChangeAspect="1"/>
           </p:cNvPicPr>
@@ -17566,8 +17566,8 @@
         </p:blipFill>
         <p:spPr>
           <a:xfrm>
-            <a:off x="5500624" y="3337560"/>
-            <a:ext cx="1191768" cy="512064"/>
+            <a:off x="5525317" y="3337560"/>
+            <a:ext cx="1362456" cy="676656"/>
           </a:xfrm>
           <a:prstGeom prst="rect">
             <a:avLst/>
@@ -17582,8 +17582,8 @@
         </p:nvSpPr>
         <p:spPr>
           <a:xfrm>
-            <a:off x="6692392" y="3364991"/>
-            <a:ext cx="2099056" cy="457200"/>
+            <a:off x="6887773" y="3447288"/>
+            <a:ext cx="1299682" cy="457200"/>
           </a:xfrm>
           <a:prstGeom prst="rect">
             <a:avLst/>
@@ -17592,7 +17592,7 @@
         </p:spPr>
         <p:txBody>
           <a:bodyPr wrap="none" lIns="45720" rIns="45720" tIns="18288" bIns="18288" anchor="ctr">
-            <a:spAutoFit/>
+            <a:noAutofit/>
           </a:bodyPr>
           <a:lstStyle/>
           <a:p>
@@ -17625,7 +17625,7 @@
         </p:blipFill>
         <p:spPr>
           <a:xfrm>
-            <a:off x="8654288" y="3424428"/>
+            <a:off x="8050295" y="3506724"/>
             <a:ext cx="783336" cy="338328"/>
           </a:xfrm>
           <a:prstGeom prst="rect">
@@ -17641,8 +17641,8 @@
         </p:nvSpPr>
         <p:spPr>
           <a:xfrm>
-            <a:off x="9437624" y="3364991"/>
-            <a:ext cx="382016" cy="457200"/>
+            <a:off x="8833631" y="3447288"/>
+            <a:ext cx="326842" cy="457200"/>
           </a:xfrm>
           <a:prstGeom prst="rect">
             <a:avLst/>
@@ -17651,7 +17651,7 @@
         </p:spPr>
         <p:txBody>
           <a:bodyPr wrap="none" lIns="45720" rIns="45720" tIns="18288" bIns="18288" anchor="ctr">
-            <a:spAutoFit/>
+            <a:noAutofit/>
           </a:bodyPr>
           <a:lstStyle/>
           <a:p>
@@ -17968,7 +17968,7 @@
       </p:cxnSp>
       <p:pic>
         <p:nvPicPr>
-          <p:cNvPr id="10" name="Picture 9" descr="04881d449566ef06.png"/>
+          <p:cNvPr id="10" name="Picture 9" descr="4a01213497560659.png"/>
           <p:cNvPicPr>
             <a:picLocks noChangeAspect="1"/>
           </p:cNvPicPr>
@@ -17982,8 +17982,8 @@
         </p:blipFill>
         <p:spPr>
           <a:xfrm>
-            <a:off x="1768348" y="2366772"/>
-            <a:ext cx="1405128" cy="563880"/>
+            <a:off x="2261088" y="2377440"/>
+            <a:ext cx="1514856" cy="743712"/>
           </a:xfrm>
           <a:prstGeom prst="rect">
             <a:avLst/>
@@ -17998,8 +17998,8 @@
         </p:nvSpPr>
         <p:spPr>
           <a:xfrm>
-            <a:off x="3173476" y="2420112"/>
-            <a:ext cx="1927352" cy="457200"/>
+            <a:off x="3775944" y="2520696"/>
+            <a:ext cx="1183151" cy="457200"/>
           </a:xfrm>
           <a:prstGeom prst="rect">
             <a:avLst/>
@@ -18008,7 +18008,7 @@
         </p:spPr>
         <p:txBody>
           <a:bodyPr wrap="none" lIns="45720" rIns="45720" tIns="18288" bIns="18288" anchor="ctr">
-            <a:spAutoFit/>
+            <a:noAutofit/>
           </a:bodyPr>
           <a:lstStyle/>
           <a:p>
@@ -18027,7 +18027,7 @@
       </p:sp>
       <p:pic>
         <p:nvPicPr>
-          <p:cNvPr id="12" name="Picture 11" descr="d42b2725f97939e6.png"/>
+          <p:cNvPr id="12" name="Picture 11" descr="14ce7c2dcb3c68b0.png"/>
           <p:cNvPicPr>
             <a:picLocks noChangeAspect="1"/>
           </p:cNvPicPr>
@@ -18041,8 +18041,8 @@
         </p:blipFill>
         <p:spPr>
           <a:xfrm>
-            <a:off x="4963667" y="2340864"/>
-            <a:ext cx="2008632" cy="615696"/>
+            <a:off x="4821935" y="2340864"/>
+            <a:ext cx="2218944" cy="816864"/>
           </a:xfrm>
           <a:prstGeom prst="rect">
             <a:avLst/>
@@ -18057,8 +18057,8 @@
         </p:nvSpPr>
         <p:spPr>
           <a:xfrm>
-            <a:off x="6972300" y="2420112"/>
-            <a:ext cx="1927352" cy="457200"/>
+            <a:off x="7040879" y="2520696"/>
+            <a:ext cx="1183151" cy="457200"/>
           </a:xfrm>
           <a:prstGeom prst="rect">
             <a:avLst/>
@@ -18067,7 +18067,7 @@
         </p:spPr>
         <p:txBody>
           <a:bodyPr wrap="none" lIns="45720" rIns="45720" tIns="18288" bIns="18288" anchor="ctr">
-            <a:spAutoFit/>
+            <a:noAutofit/>
           </a:bodyPr>
           <a:lstStyle/>
           <a:p>
@@ -18086,7 +18086,7 @@
       </p:sp>
       <p:pic>
         <p:nvPicPr>
-          <p:cNvPr id="14" name="Picture 13" descr="9708bec074f1f4e1.png"/>
+          <p:cNvPr id="14" name="Picture 13" descr="e22c042699683ec6.png"/>
           <p:cNvPicPr>
             <a:picLocks noChangeAspect="1"/>
           </p:cNvPicPr>
@@ -18100,8 +18100,8 @@
         </p:blipFill>
         <p:spPr>
           <a:xfrm>
-            <a:off x="8762492" y="2346960"/>
-            <a:ext cx="1630680" cy="603504"/>
+            <a:off x="8086871" y="2345436"/>
+            <a:ext cx="1813560" cy="807720"/>
           </a:xfrm>
           <a:prstGeom prst="rect">
             <a:avLst/>
@@ -18110,7 +18110,7 @@
       </p:pic>
       <p:pic>
         <p:nvPicPr>
-          <p:cNvPr id="15" name="Picture 14" descr="4ff59d9fe39675b9.png"/>
+          <p:cNvPr id="15" name="Picture 14" descr="139d981e7ff2f187.png"/>
           <p:cNvPicPr>
             <a:picLocks noChangeAspect="1"/>
           </p:cNvPicPr>
@@ -18124,8 +18124,8 @@
         </p:blipFill>
         <p:spPr>
           <a:xfrm>
-            <a:off x="5204460" y="3230880"/>
-            <a:ext cx="1752600" cy="679704"/>
+            <a:off x="4927091" y="3432047"/>
+            <a:ext cx="2307336" cy="917448"/>
           </a:xfrm>
           <a:prstGeom prst="rect">
             <a:avLst/>
@@ -18140,7 +18140,7 @@
         </p:nvSpPr>
         <p:spPr>
           <a:xfrm>
-            <a:off x="987552" y="4248912"/>
+            <a:off x="987552" y="4687823"/>
             <a:ext cx="10131551" cy="475488"/>
           </a:xfrm>
           <a:prstGeom prst="rect">
@@ -18467,7 +18467,7 @@
       </p:cxnSp>
       <p:pic>
         <p:nvPicPr>
-          <p:cNvPr id="10" name="Picture 9" descr="b675d61fc2d3f29b.png"/>
+          <p:cNvPr id="10" name="Picture 9" descr="11fbd5a0dc453d10.png"/>
           <p:cNvPicPr>
             <a:picLocks noChangeAspect="1"/>
           </p:cNvPicPr>
@@ -18481,8 +18481,8 @@
         </p:blipFill>
         <p:spPr>
           <a:xfrm>
-            <a:off x="1265935" y="2362200"/>
-            <a:ext cx="4352544" cy="560832"/>
+            <a:off x="1439916" y="2375916"/>
+            <a:ext cx="4462272" cy="740664"/>
           </a:xfrm>
           <a:prstGeom prst="rect">
             <a:avLst/>
@@ -18497,8 +18497,8 @@
         </p:nvSpPr>
         <p:spPr>
           <a:xfrm>
-            <a:off x="5618479" y="2414016"/>
-            <a:ext cx="1927352" cy="457200"/>
+            <a:off x="5902188" y="2517648"/>
+            <a:ext cx="1183151" cy="457200"/>
           </a:xfrm>
           <a:prstGeom prst="rect">
             <a:avLst/>
@@ -18507,7 +18507,7 @@
         </p:spPr>
         <p:txBody>
           <a:bodyPr wrap="none" lIns="45720" rIns="45720" tIns="18288" bIns="18288" anchor="ctr">
-            <a:spAutoFit/>
+            <a:noAutofit/>
           </a:bodyPr>
           <a:lstStyle/>
           <a:p>
@@ -18526,7 +18526,7 @@
       </p:sp>
       <p:pic>
         <p:nvPicPr>
-          <p:cNvPr id="12" name="Picture 11" descr="fd6bca2366a0746a.png"/>
+          <p:cNvPr id="12" name="Picture 11" descr="d56b677d6cac8c54.png"/>
           <p:cNvPicPr>
             <a:picLocks noChangeAspect="1"/>
           </p:cNvPicPr>
@@ -18540,8 +18540,8 @@
         </p:blipFill>
         <p:spPr>
           <a:xfrm>
-            <a:off x="7408672" y="2340864"/>
-            <a:ext cx="3486912" cy="603504"/>
+            <a:off x="6948179" y="2340864"/>
+            <a:ext cx="3773424" cy="810768"/>
           </a:xfrm>
           <a:prstGeom prst="rect">
             <a:avLst/>
@@ -18550,7 +18550,7 @@
       </p:pic>
       <p:pic>
         <p:nvPicPr>
-          <p:cNvPr id="13" name="Picture 12" descr="788d50e52115aced.png"/>
+          <p:cNvPr id="13" name="Picture 12" descr="630ef586624fdd1f.png"/>
           <p:cNvPicPr>
             <a:picLocks noChangeAspect="1"/>
           </p:cNvPicPr>
@@ -18564,8 +18564,8 @@
         </p:blipFill>
         <p:spPr>
           <a:xfrm>
-            <a:off x="4381499" y="3218688"/>
-            <a:ext cx="3398520" cy="618744"/>
+            <a:off x="4325112" y="3425952"/>
+            <a:ext cx="3511296" cy="822960"/>
           </a:xfrm>
           <a:prstGeom prst="rect">
             <a:avLst/>
@@ -18580,7 +18580,7 @@
         </p:nvSpPr>
         <p:spPr>
           <a:xfrm>
-            <a:off x="987552" y="4175760"/>
+            <a:off x="987552" y="4587240"/>
             <a:ext cx="10131551" cy="475488"/>
           </a:xfrm>
           <a:prstGeom prst="rect">
@@ -19253,7 +19253,7 @@
       </p:sp>
       <p:pic>
         <p:nvPicPr>
-          <p:cNvPr id="11" name="Picture 10" descr="882ac73fb41e4443.png"/>
+          <p:cNvPr id="11" name="Picture 10" descr="9fd087882e95b8da.png"/>
           <p:cNvPicPr>
             <a:picLocks noChangeAspect="1"/>
           </p:cNvPicPr>
@@ -19268,7 +19268,7 @@
         <p:spPr>
           <a:xfrm>
             <a:off x="1828800" y="2618232"/>
-            <a:ext cx="2593848" cy="661416"/>
+            <a:ext cx="2825496" cy="890016"/>
           </a:xfrm>
           <a:prstGeom prst="rect">
             <a:avLst/>
@@ -19283,8 +19283,8 @@
         </p:nvSpPr>
         <p:spPr>
           <a:xfrm>
-            <a:off x="4879847" y="2720340"/>
-            <a:ext cx="6400800" cy="502920"/>
+            <a:off x="5111496" y="2834640"/>
+            <a:ext cx="6272783" cy="502920"/>
           </a:xfrm>
           <a:prstGeom prst="rect">
             <a:avLst/>

--- a/a7/build/out/u3/A7 3.T2  Slides.pptx
+++ b/a7/build/out/u3/A7 3.T2  Slides.pptx
@@ -3835,7 +3835,7 @@
       </p:sp>
       <p:pic>
         <p:nvPicPr>
-          <p:cNvPr id="9" name="Picture 8" descr="26181856cce005b5.png"/>
+          <p:cNvPr id="9" name="Picture 8" descr="450d7a0354299ed9.png"/>
           <p:cNvPicPr>
             <a:picLocks noChangeAspect="1"/>
           </p:cNvPicPr>
@@ -3849,8 +3849,8 @@
         </p:blipFill>
         <p:spPr>
           <a:xfrm>
-            <a:off x="4526279" y="2194560"/>
-            <a:ext cx="3108960" cy="515112"/>
+            <a:off x="4524755" y="2194560"/>
+            <a:ext cx="3112008" cy="515112"/>
           </a:xfrm>
           <a:prstGeom prst="rect">
             <a:avLst/>
@@ -4565,7 +4565,7 @@
       </p:sp>
       <p:pic>
         <p:nvPicPr>
-          <p:cNvPr id="9" name="Picture 8" descr="50895fac28ab58c6.png"/>
+          <p:cNvPr id="9" name="Picture 8" descr="e48218bf3a7b1ca4.png"/>
           <p:cNvPicPr>
             <a:picLocks noChangeAspect="1"/>
           </p:cNvPicPr>
@@ -4580,7 +4580,7 @@
         <p:spPr>
           <a:xfrm>
             <a:off x="1828800" y="1920240"/>
-            <a:ext cx="2971800" cy="816864"/>
+            <a:ext cx="2974848" cy="816864"/>
           </a:xfrm>
           <a:prstGeom prst="rect">
             <a:avLst/>
@@ -4595,8 +4595,8 @@
         </p:nvSpPr>
         <p:spPr>
           <a:xfrm>
-            <a:off x="5257800" y="2100072"/>
-            <a:ext cx="6126479" cy="502920"/>
+            <a:off x="5260848" y="2100072"/>
+            <a:ext cx="6123431" cy="502920"/>
           </a:xfrm>
           <a:prstGeom prst="rect">
             <a:avLst/>
@@ -4651,7 +4651,7 @@
       </p:sp>
       <p:pic>
         <p:nvPicPr>
-          <p:cNvPr id="11" name="Picture 10" descr="2620027e86f81ef9.png"/>
+          <p:cNvPr id="11" name="Picture 10" descr="732a8b0591bf3c71.png"/>
           <p:cNvPicPr>
             <a:picLocks noChangeAspect="1"/>
           </p:cNvPicPr>
@@ -5376,7 +5376,7 @@
       </p:sp>
       <p:pic>
         <p:nvPicPr>
-          <p:cNvPr id="9" name="Picture 8" descr="c42f4571630d5047.png"/>
+          <p:cNvPr id="9" name="Picture 8" descr="af1ad5233a94de3d.png"/>
           <p:cNvPicPr>
             <a:picLocks noChangeAspect="1"/>
           </p:cNvPicPr>
@@ -5390,8 +5390,8 @@
         </p:blipFill>
         <p:spPr>
           <a:xfrm>
-            <a:off x="5193792" y="2194560"/>
-            <a:ext cx="1773936" cy="1112520"/>
+            <a:off x="5190743" y="2194560"/>
+            <a:ext cx="1780032" cy="1112520"/>
           </a:xfrm>
           <a:prstGeom prst="rect">
             <a:avLst/>
@@ -6150,7 +6150,7 @@
       </p:sp>
       <p:pic>
         <p:nvPicPr>
-          <p:cNvPr id="9" name="Picture 8" descr="49cdf5a8f688d8ec.png"/>
+          <p:cNvPr id="9" name="Picture 8" descr="e1a9b92e4dabf4ff.png"/>
           <p:cNvPicPr>
             <a:picLocks noChangeAspect="1"/>
           </p:cNvPicPr>
@@ -6165,7 +6165,7 @@
         <p:spPr>
           <a:xfrm>
             <a:off x="5737859" y="2103120"/>
-            <a:ext cx="685800" cy="429768"/>
+            <a:ext cx="685800" cy="423672"/>
           </a:xfrm>
           <a:prstGeom prst="rect">
             <a:avLst/>
@@ -6180,7 +6180,7 @@
         </p:nvSpPr>
         <p:spPr>
           <a:xfrm>
-            <a:off x="1828800" y="2807207"/>
+            <a:off x="1828800" y="2801111"/>
             <a:ext cx="8503920" cy="548640"/>
           </a:xfrm>
           <a:prstGeom prst="rect">
@@ -6897,7 +6897,7 @@
       </p:sp>
       <p:pic>
         <p:nvPicPr>
-          <p:cNvPr id="9" name="Picture 8" descr="70a7739fb7946438.png"/>
+          <p:cNvPr id="9" name="Picture 8" descr="559e61ec96faa8d6.png"/>
           <p:cNvPicPr>
             <a:picLocks noChangeAspect="1"/>
           </p:cNvPicPr>
@@ -6911,8 +6911,8 @@
         </p:blipFill>
         <p:spPr>
           <a:xfrm>
-            <a:off x="5722620" y="2103120"/>
-            <a:ext cx="716280" cy="1036320"/>
+            <a:off x="5719571" y="2103120"/>
+            <a:ext cx="722376" cy="1033271"/>
           </a:xfrm>
           <a:prstGeom prst="rect">
             <a:avLst/>
@@ -6927,7 +6927,7 @@
         </p:nvSpPr>
         <p:spPr>
           <a:xfrm>
-            <a:off x="1828800" y="3413759"/>
+            <a:off x="1828800" y="3410711"/>
             <a:ext cx="8503920" cy="548640"/>
           </a:xfrm>
           <a:prstGeom prst="rect">
@@ -8379,7 +8379,7 @@
       </p:sp>
       <p:pic>
         <p:nvPicPr>
-          <p:cNvPr id="10" name="Picture 9" descr="270dca7efd9a2928.png"/>
+          <p:cNvPr id="10" name="Picture 9" descr="279e9e7a584d29df.png"/>
           <p:cNvPicPr>
             <a:picLocks noChangeAspect="1"/>
           </p:cNvPicPr>
@@ -9222,7 +9222,7 @@
       </p:sp>
       <p:pic>
         <p:nvPicPr>
-          <p:cNvPr id="9" name="Picture 8" descr="42962fa6a8bfce14.png"/>
+          <p:cNvPr id="9" name="Picture 8" descr="f20596ac66be7a70.png"/>
           <p:cNvPicPr>
             <a:picLocks noChangeAspect="1"/>
           </p:cNvPicPr>
@@ -9236,8 +9236,8 @@
         </p:blipFill>
         <p:spPr>
           <a:xfrm>
-            <a:off x="5404103" y="2103120"/>
-            <a:ext cx="1353312" cy="530352"/>
+            <a:off x="5402580" y="2103120"/>
+            <a:ext cx="1356360" cy="527304"/>
           </a:xfrm>
           <a:prstGeom prst="rect">
             <a:avLst/>
@@ -9252,7 +9252,7 @@
         </p:nvSpPr>
         <p:spPr>
           <a:xfrm>
-            <a:off x="1828800" y="2907791"/>
+            <a:off x="1828800" y="2904743"/>
             <a:ext cx="8503920" cy="548640"/>
           </a:xfrm>
           <a:prstGeom prst="rect">
@@ -10172,7 +10172,7 @@
       </p:sp>
       <p:pic>
         <p:nvPicPr>
-          <p:cNvPr id="9" name="Picture 8" descr="950663683f0a3af4.png"/>
+          <p:cNvPr id="9" name="Picture 8" descr="475c3eb32f30abcb.png"/>
           <p:cNvPicPr>
             <a:picLocks noChangeAspect="1"/>
           </p:cNvPicPr>
@@ -10186,8 +10186,8 @@
         </p:blipFill>
         <p:spPr>
           <a:xfrm>
-            <a:off x="5364480" y="2103120"/>
-            <a:ext cx="1432560" cy="429768"/>
+            <a:off x="5366004" y="2103120"/>
+            <a:ext cx="1429512" cy="429768"/>
           </a:xfrm>
           <a:prstGeom prst="rect">
             <a:avLst/>
@@ -11319,7 +11319,7 @@
       </p:sp>
       <p:pic>
         <p:nvPicPr>
-          <p:cNvPr id="9" name="Picture 8" descr="cd9c5622a19be95d.png"/>
+          <p:cNvPr id="9" name="Picture 8" descr="f75ba70705ade947.png"/>
           <p:cNvPicPr>
             <a:picLocks noChangeAspect="1"/>
           </p:cNvPicPr>
@@ -11333,8 +11333,8 @@
         </p:blipFill>
         <p:spPr>
           <a:xfrm>
-            <a:off x="5358383" y="2103120"/>
-            <a:ext cx="1444752" cy="518160"/>
+            <a:off x="5355336" y="2103120"/>
+            <a:ext cx="1450848" cy="515112"/>
           </a:xfrm>
           <a:prstGeom prst="rect">
             <a:avLst/>
@@ -11349,7 +11349,7 @@
         </p:nvSpPr>
         <p:spPr>
           <a:xfrm>
-            <a:off x="777240" y="2849879"/>
+            <a:off x="777240" y="2846832"/>
             <a:ext cx="10607040" cy="465151"/>
           </a:xfrm>
           <a:prstGeom prst="rect">
@@ -11384,7 +11384,7 @@
         </p:nvSpPr>
         <p:spPr>
           <a:xfrm>
-            <a:off x="1874519" y="3516199"/>
+            <a:off x="1874519" y="3513151"/>
             <a:ext cx="4572000" cy="548640"/>
           </a:xfrm>
           <a:prstGeom prst="rect">
@@ -11437,7 +11437,7 @@
         </p:nvSpPr>
         <p:spPr>
           <a:xfrm>
-            <a:off x="6629400" y="3516199"/>
+            <a:off x="6629400" y="3513151"/>
             <a:ext cx="4572000" cy="548640"/>
           </a:xfrm>
           <a:prstGeom prst="rect">
@@ -11490,7 +11490,7 @@
         </p:nvSpPr>
         <p:spPr>
           <a:xfrm>
-            <a:off x="1874519" y="4201999"/>
+            <a:off x="1874519" y="4198951"/>
             <a:ext cx="4572000" cy="548640"/>
           </a:xfrm>
           <a:prstGeom prst="rect">
@@ -11534,7 +11534,7 @@
         </p:nvSpPr>
         <p:spPr>
           <a:xfrm>
-            <a:off x="6629400" y="4201999"/>
+            <a:off x="6629400" y="4198951"/>
             <a:ext cx="4572000" cy="548640"/>
           </a:xfrm>
           <a:prstGeom prst="rect">
@@ -11596,7 +11596,7 @@
         </p:nvSpPr>
         <p:spPr>
           <a:xfrm>
-            <a:off x="777240" y="5207839"/>
+            <a:off x="777240" y="5204791"/>
             <a:ext cx="10607040" cy="548640"/>
           </a:xfrm>
           <a:prstGeom prst="rect">
@@ -12254,7 +12254,7 @@
       </p:sp>
       <p:pic>
         <p:nvPicPr>
-          <p:cNvPr id="9" name="Picture 8" descr="61aec65184b6beb1.png"/>
+          <p:cNvPr id="9" name="Picture 8" descr="206225517bbdc36d.png"/>
           <p:cNvPicPr>
             <a:picLocks noChangeAspect="1"/>
           </p:cNvPicPr>
@@ -12268,8 +12268,8 @@
         </p:blipFill>
         <p:spPr>
           <a:xfrm>
-            <a:off x="5779007" y="2103120"/>
-            <a:ext cx="603504" cy="1005840"/>
+            <a:off x="5771388" y="2103120"/>
+            <a:ext cx="618744" cy="1005840"/>
           </a:xfrm>
           <a:prstGeom prst="rect">
             <a:avLst/>
@@ -13905,7 +13905,7 @@
       </p:sp>
       <p:pic>
         <p:nvPicPr>
-          <p:cNvPr id="12" name="Picture 11" descr="768d523c6bd8c018.png"/>
+          <p:cNvPr id="12" name="Picture 11" descr="660742bc89c11a01.png"/>
           <p:cNvPicPr>
             <a:picLocks noChangeAspect="1"/>
           </p:cNvPicPr>
@@ -14877,7 +14877,7 @@
       </p:sp>
       <p:pic>
         <p:nvPicPr>
-          <p:cNvPr id="10" name="Picture 9" descr="cc078cbc81823c99.png"/>
+          <p:cNvPr id="10" name="Picture 9" descr="899d3ea6912bf446.png"/>
           <p:cNvPicPr>
             <a:picLocks noChangeAspect="1"/>
           </p:cNvPicPr>
@@ -14936,7 +14936,7 @@
       </p:sp>
       <p:pic>
         <p:nvPicPr>
-          <p:cNvPr id="12" name="Picture 11" descr="d31e0d14216148d7.png"/>
+          <p:cNvPr id="12" name="Picture 11" descr="ab89a53f283b5554.png"/>
           <p:cNvPicPr>
             <a:picLocks noChangeAspect="1"/>
           </p:cNvPicPr>
@@ -15030,7 +15030,7 @@
       </p:sp>
       <p:pic>
         <p:nvPicPr>
-          <p:cNvPr id="15" name="Picture 14" descr="118dd4b796dc8502.png"/>
+          <p:cNvPr id="15" name="Picture 14" descr="dbda9c11c9673f54.png"/>
           <p:cNvPicPr>
             <a:picLocks noChangeAspect="1"/>
           </p:cNvPicPr>
@@ -17493,7 +17493,7 @@
       </p:graphicFrame>
       <p:pic>
         <p:nvPicPr>
-          <p:cNvPr id="12" name="Picture 11" descr="bdde8a8975ae9591.png"/>
+          <p:cNvPr id="12" name="Picture 11" descr="87675c2f7467729d.png"/>
           <p:cNvPicPr>
             <a:picLocks noChangeAspect="1"/>
           </p:cNvPicPr>
@@ -17507,7 +17507,7 @@
         </p:blipFill>
         <p:spPr>
           <a:xfrm>
-            <a:off x="3138205" y="3337560"/>
+            <a:off x="3139729" y="3337560"/>
             <a:ext cx="1341120" cy="676656"/>
           </a:xfrm>
           <a:prstGeom prst="rect">
@@ -17523,7 +17523,7 @@
         </p:nvSpPr>
         <p:spPr>
           <a:xfrm>
-            <a:off x="4479325" y="3447288"/>
+            <a:off x="4480849" y="3447288"/>
             <a:ext cx="1183151" cy="457200"/>
           </a:xfrm>
           <a:prstGeom prst="rect">
@@ -17552,7 +17552,7 @@
       </p:sp>
       <p:pic>
         <p:nvPicPr>
-          <p:cNvPr id="14" name="Picture 13" descr="c4f6df0ed7877f2a.png"/>
+          <p:cNvPr id="14" name="Picture 13" descr="2adecdac76fbb78c.png"/>
           <p:cNvPicPr>
             <a:picLocks noChangeAspect="1"/>
           </p:cNvPicPr>
@@ -17566,8 +17566,8 @@
         </p:blipFill>
         <p:spPr>
           <a:xfrm>
-            <a:off x="5525317" y="3337560"/>
-            <a:ext cx="1362456" cy="676656"/>
+            <a:off x="5526841" y="3337560"/>
+            <a:ext cx="1359408" cy="676656"/>
           </a:xfrm>
           <a:prstGeom prst="rect">
             <a:avLst/>
@@ -17582,7 +17582,7 @@
         </p:nvSpPr>
         <p:spPr>
           <a:xfrm>
-            <a:off x="6887773" y="3447288"/>
+            <a:off x="6886249" y="3447288"/>
             <a:ext cx="1299682" cy="457200"/>
           </a:xfrm>
           <a:prstGeom prst="rect">
@@ -17611,7 +17611,7 @@
       </p:sp>
       <p:pic>
         <p:nvPicPr>
-          <p:cNvPr id="16" name="Picture 15" descr="5b8f4c33711ab878.png"/>
+          <p:cNvPr id="16" name="Picture 15" descr="69a124f957c6b4cc.png"/>
           <p:cNvPicPr>
             <a:picLocks noChangeAspect="1"/>
           </p:cNvPicPr>
@@ -17625,7 +17625,7 @@
         </p:blipFill>
         <p:spPr>
           <a:xfrm>
-            <a:off x="8050295" y="3506724"/>
+            <a:off x="8048771" y="3506724"/>
             <a:ext cx="783336" cy="338328"/>
           </a:xfrm>
           <a:prstGeom prst="rect">
@@ -17641,7 +17641,7 @@
         </p:nvSpPr>
         <p:spPr>
           <a:xfrm>
-            <a:off x="8833631" y="3447288"/>
+            <a:off x="8832107" y="3447288"/>
             <a:ext cx="326842" cy="457200"/>
           </a:xfrm>
           <a:prstGeom prst="rect">
@@ -17968,7 +17968,7 @@
       </p:cxnSp>
       <p:pic>
         <p:nvPicPr>
-          <p:cNvPr id="10" name="Picture 9" descr="4a01213497560659.png"/>
+          <p:cNvPr id="10" name="Picture 9" descr="0ab69ecc143d70bd.png"/>
           <p:cNvPicPr>
             <a:picLocks noChangeAspect="1"/>
           </p:cNvPicPr>
@@ -17982,8 +17982,8 @@
         </p:blipFill>
         <p:spPr>
           <a:xfrm>
-            <a:off x="2261088" y="2377440"/>
-            <a:ext cx="1514856" cy="743712"/>
+            <a:off x="2251944" y="2377440"/>
+            <a:ext cx="1517904" cy="743712"/>
           </a:xfrm>
           <a:prstGeom prst="rect">
             <a:avLst/>
@@ -17998,7 +17998,7 @@
         </p:nvSpPr>
         <p:spPr>
           <a:xfrm>
-            <a:off x="3775944" y="2520696"/>
+            <a:off x="3769848" y="2520696"/>
             <a:ext cx="1183151" cy="457200"/>
           </a:xfrm>
           <a:prstGeom prst="rect">
@@ -18027,7 +18027,7 @@
       </p:sp>
       <p:pic>
         <p:nvPicPr>
-          <p:cNvPr id="12" name="Picture 11" descr="14ce7c2dcb3c68b0.png"/>
+          <p:cNvPr id="12" name="Picture 11" descr="60630814804bfc07.png"/>
           <p:cNvPicPr>
             <a:picLocks noChangeAspect="1"/>
           </p:cNvPicPr>
@@ -18041,8 +18041,8 @@
         </p:blipFill>
         <p:spPr>
           <a:xfrm>
-            <a:off x="4821935" y="2340864"/>
-            <a:ext cx="2218944" cy="816864"/>
+            <a:off x="4815839" y="2340864"/>
+            <a:ext cx="2221992" cy="816864"/>
           </a:xfrm>
           <a:prstGeom prst="rect">
             <a:avLst/>
@@ -18057,7 +18057,7 @@
         </p:nvSpPr>
         <p:spPr>
           <a:xfrm>
-            <a:off x="7040879" y="2520696"/>
+            <a:off x="7037831" y="2520696"/>
             <a:ext cx="1183151" cy="457200"/>
           </a:xfrm>
           <a:prstGeom prst="rect">
@@ -18086,7 +18086,7 @@
       </p:sp>
       <p:pic>
         <p:nvPicPr>
-          <p:cNvPr id="14" name="Picture 13" descr="e22c042699683ec6.png"/>
+          <p:cNvPr id="14" name="Picture 13" descr="68ed09bab003c534.png"/>
           <p:cNvPicPr>
             <a:picLocks noChangeAspect="1"/>
           </p:cNvPicPr>
@@ -18100,8 +18100,8 @@
         </p:blipFill>
         <p:spPr>
           <a:xfrm>
-            <a:off x="8086871" y="2345436"/>
-            <a:ext cx="1813560" cy="807720"/>
+            <a:off x="8083823" y="2345436"/>
+            <a:ext cx="1825752" cy="807720"/>
           </a:xfrm>
           <a:prstGeom prst="rect">
             <a:avLst/>
@@ -18110,7 +18110,7 @@
       </p:pic>
       <p:pic>
         <p:nvPicPr>
-          <p:cNvPr id="15" name="Picture 14" descr="139d981e7ff2f187.png"/>
+          <p:cNvPr id="15" name="Picture 14" descr="69e3ce7992a6978e.png"/>
           <p:cNvPicPr>
             <a:picLocks noChangeAspect="1"/>
           </p:cNvPicPr>
@@ -18124,8 +18124,8 @@
         </p:blipFill>
         <p:spPr>
           <a:xfrm>
-            <a:off x="4927091" y="3432047"/>
-            <a:ext cx="2307336" cy="917448"/>
+            <a:off x="4919471" y="3432047"/>
+            <a:ext cx="2322576" cy="920495"/>
           </a:xfrm>
           <a:prstGeom prst="rect">
             <a:avLst/>
@@ -18140,7 +18140,7 @@
         </p:nvSpPr>
         <p:spPr>
           <a:xfrm>
-            <a:off x="987552" y="4687823"/>
+            <a:off x="987552" y="4690872"/>
             <a:ext cx="10131551" cy="475488"/>
           </a:xfrm>
           <a:prstGeom prst="rect">
@@ -18467,7 +18467,7 @@
       </p:cxnSp>
       <p:pic>
         <p:nvPicPr>
-          <p:cNvPr id="10" name="Picture 9" descr="11fbd5a0dc453d10.png"/>
+          <p:cNvPr id="10" name="Picture 9" descr="5513b8e8cb2d27bd.png"/>
           <p:cNvPicPr>
             <a:picLocks noChangeAspect="1"/>
           </p:cNvPicPr>
@@ -18481,7 +18481,7 @@
         </p:blipFill>
         <p:spPr>
           <a:xfrm>
-            <a:off x="1439916" y="2375916"/>
+            <a:off x="1433820" y="2374392"/>
             <a:ext cx="4462272" cy="740664"/>
           </a:xfrm>
           <a:prstGeom prst="rect">
@@ -18497,7 +18497,7 @@
         </p:nvSpPr>
         <p:spPr>
           <a:xfrm>
-            <a:off x="5902188" y="2517648"/>
+            <a:off x="5896092" y="2516124"/>
             <a:ext cx="1183151" cy="457200"/>
           </a:xfrm>
           <a:prstGeom prst="rect">
@@ -18526,7 +18526,7 @@
       </p:sp>
       <p:pic>
         <p:nvPicPr>
-          <p:cNvPr id="12" name="Picture 11" descr="d56b677d6cac8c54.png"/>
+          <p:cNvPr id="12" name="Picture 11" descr="003efac2bd7b70d9.png"/>
           <p:cNvPicPr>
             <a:picLocks noChangeAspect="1"/>
           </p:cNvPicPr>
@@ -18540,8 +18540,8 @@
         </p:blipFill>
         <p:spPr>
           <a:xfrm>
-            <a:off x="6948179" y="2340864"/>
-            <a:ext cx="3773424" cy="810768"/>
+            <a:off x="6942083" y="2340864"/>
+            <a:ext cx="3785615" cy="807720"/>
           </a:xfrm>
           <a:prstGeom prst="rect">
             <a:avLst/>
@@ -18550,7 +18550,7 @@
       </p:pic>
       <p:pic>
         <p:nvPicPr>
-          <p:cNvPr id="13" name="Picture 12" descr="630ef586624fdd1f.png"/>
+          <p:cNvPr id="13" name="Picture 12" descr="e889baf54ca49aca.png"/>
           <p:cNvPicPr>
             <a:picLocks noChangeAspect="1"/>
           </p:cNvPicPr>
@@ -18564,8 +18564,8 @@
         </p:blipFill>
         <p:spPr>
           <a:xfrm>
-            <a:off x="4325112" y="3425952"/>
-            <a:ext cx="3511296" cy="822960"/>
+            <a:off x="4325112" y="3422904"/>
+            <a:ext cx="3511296" cy="819912"/>
           </a:xfrm>
           <a:prstGeom prst="rect">
             <a:avLst/>
@@ -18580,7 +18580,7 @@
         </p:nvSpPr>
         <p:spPr>
           <a:xfrm>
-            <a:off x="987552" y="4587240"/>
+            <a:off x="987552" y="4581144"/>
             <a:ext cx="10131551" cy="475488"/>
           </a:xfrm>
           <a:prstGeom prst="rect">
@@ -19194,7 +19194,7 @@
       </p:sp>
       <p:pic>
         <p:nvPicPr>
-          <p:cNvPr id="9" name="Picture 8" descr="8961ccca56090e70.png"/>
+          <p:cNvPr id="9" name="Picture 8" descr="cb6908d478c4c4d5.png"/>
           <p:cNvPicPr>
             <a:picLocks noChangeAspect="1"/>
           </p:cNvPicPr>
@@ -19209,7 +19209,7 @@
         <p:spPr>
           <a:xfrm>
             <a:off x="1828800" y="1920240"/>
-            <a:ext cx="6172200" cy="423672"/>
+            <a:ext cx="6169152" cy="423672"/>
           </a:xfrm>
           <a:prstGeom prst="rect">
             <a:avLst/>
@@ -19224,8 +19224,8 @@
         </p:nvSpPr>
         <p:spPr>
           <a:xfrm>
-            <a:off x="8458200" y="1903476"/>
-            <a:ext cx="2926079" cy="502920"/>
+            <a:off x="8455152" y="1903476"/>
+            <a:ext cx="2929128" cy="502920"/>
           </a:xfrm>
           <a:prstGeom prst="rect">
             <a:avLst/>
@@ -19253,7 +19253,7 @@
       </p:sp>
       <p:pic>
         <p:nvPicPr>
-          <p:cNvPr id="11" name="Picture 10" descr="9fd087882e95b8da.png"/>
+          <p:cNvPr id="11" name="Picture 10" descr="3b9efb2695797439.png"/>
           <p:cNvPicPr>
             <a:picLocks noChangeAspect="1"/>
           </p:cNvPicPr>
@@ -19268,7 +19268,7 @@
         <p:spPr>
           <a:xfrm>
             <a:off x="1828800" y="2618232"/>
-            <a:ext cx="2825496" cy="890016"/>
+            <a:ext cx="2828544" cy="883920"/>
           </a:xfrm>
           <a:prstGeom prst="rect">
             <a:avLst/>
@@ -19283,8 +19283,8 @@
         </p:nvSpPr>
         <p:spPr>
           <a:xfrm>
-            <a:off x="5111496" y="2834640"/>
-            <a:ext cx="6272783" cy="502920"/>
+            <a:off x="5114544" y="2831592"/>
+            <a:ext cx="6269735" cy="502920"/>
           </a:xfrm>
           <a:prstGeom prst="rect">
             <a:avLst/>

--- a/a7/build/out/u3/A7 3.T2  Slides.pptx
+++ b/a7/build/out/u3/A7 3.T2  Slides.pptx
@@ -3835,7 +3835,7 @@
       </p:sp>
       <p:pic>
         <p:nvPicPr>
-          <p:cNvPr id="9" name="Picture 8" descr="450d7a0354299ed9.png"/>
+          <p:cNvPr id="9" name="Picture 8" descr="6f4e119bf12e311e.png"/>
           <p:cNvPicPr>
             <a:picLocks noChangeAspect="1"/>
           </p:cNvPicPr>
@@ -3849,8 +3849,8 @@
         </p:blipFill>
         <p:spPr>
           <a:xfrm>
-            <a:off x="4524755" y="2194560"/>
-            <a:ext cx="3112008" cy="515112"/>
+            <a:off x="4526279" y="2194560"/>
+            <a:ext cx="3108960" cy="518160"/>
           </a:xfrm>
           <a:prstGeom prst="rect">
             <a:avLst/>
@@ -3865,7 +3865,7 @@
         </p:nvSpPr>
         <p:spPr>
           <a:xfrm>
-            <a:off x="777240" y="3029712"/>
+            <a:off x="777240" y="3032760"/>
             <a:ext cx="10607040" cy="429370"/>
           </a:xfrm>
           <a:prstGeom prst="rect">
@@ -4565,7 +4565,7 @@
       </p:sp>
       <p:pic>
         <p:nvPicPr>
-          <p:cNvPr id="9" name="Picture 8" descr="e48218bf3a7b1ca4.png"/>
+          <p:cNvPr id="9" name="Picture 8" descr="dc62f1bbbc7a81f8.png"/>
           <p:cNvPicPr>
             <a:picLocks noChangeAspect="1"/>
           </p:cNvPicPr>
@@ -4580,7 +4580,7 @@
         <p:spPr>
           <a:xfrm>
             <a:off x="1828800" y="1920240"/>
-            <a:ext cx="2974848" cy="816864"/>
+            <a:ext cx="2965704" cy="816864"/>
           </a:xfrm>
           <a:prstGeom prst="rect">
             <a:avLst/>
@@ -4595,8 +4595,8 @@
         </p:nvSpPr>
         <p:spPr>
           <a:xfrm>
-            <a:off x="5260848" y="2100072"/>
-            <a:ext cx="6123431" cy="502920"/>
+            <a:off x="5251704" y="2100072"/>
+            <a:ext cx="6132575" cy="502920"/>
           </a:xfrm>
           <a:prstGeom prst="rect">
             <a:avLst/>
@@ -4651,7 +4651,7 @@
       </p:sp>
       <p:pic>
         <p:nvPicPr>
-          <p:cNvPr id="11" name="Picture 10" descr="732a8b0591bf3c71.png"/>
+          <p:cNvPr id="11" name="Picture 10" descr="d55cada8037b336a.png"/>
           <p:cNvPicPr>
             <a:picLocks noChangeAspect="1"/>
           </p:cNvPicPr>
@@ -4666,7 +4666,7 @@
         <p:spPr>
           <a:xfrm>
             <a:off x="1828800" y="3011423"/>
-            <a:ext cx="1408176" cy="807720"/>
+            <a:ext cx="1399032" cy="807720"/>
           </a:xfrm>
           <a:prstGeom prst="rect">
             <a:avLst/>
@@ -4681,7 +4681,7 @@
         </p:nvSpPr>
         <p:spPr>
           <a:xfrm>
-            <a:off x="3694176" y="3186683"/>
+            <a:off x="3685032" y="3186683"/>
             <a:ext cx="6400800" cy="502920"/>
           </a:xfrm>
           <a:prstGeom prst="rect">
@@ -5376,7 +5376,7 @@
       </p:sp>
       <p:pic>
         <p:nvPicPr>
-          <p:cNvPr id="9" name="Picture 8" descr="af1ad5233a94de3d.png"/>
+          <p:cNvPr id="9" name="Picture 8" descr="195018b9c2dda353.png"/>
           <p:cNvPicPr>
             <a:picLocks noChangeAspect="1"/>
           </p:cNvPicPr>
@@ -5390,8 +5390,8 @@
         </p:blipFill>
         <p:spPr>
           <a:xfrm>
-            <a:off x="5190743" y="2194560"/>
-            <a:ext cx="1780032" cy="1112520"/>
+            <a:off x="5192267" y="2194560"/>
+            <a:ext cx="1776984" cy="1112520"/>
           </a:xfrm>
           <a:prstGeom prst="rect">
             <a:avLst/>
@@ -6150,7 +6150,7 @@
       </p:sp>
       <p:pic>
         <p:nvPicPr>
-          <p:cNvPr id="9" name="Picture 8" descr="e1a9b92e4dabf4ff.png"/>
+          <p:cNvPr id="9" name="Picture 8" descr="6299b72688be4fad.png"/>
           <p:cNvPicPr>
             <a:picLocks noChangeAspect="1"/>
           </p:cNvPicPr>
@@ -6897,7 +6897,7 @@
       </p:sp>
       <p:pic>
         <p:nvPicPr>
-          <p:cNvPr id="9" name="Picture 8" descr="559e61ec96faa8d6.png"/>
+          <p:cNvPr id="9" name="Picture 8" descr="1b19adcea2f05b41.png"/>
           <p:cNvPicPr>
             <a:picLocks noChangeAspect="1"/>
           </p:cNvPicPr>
@@ -6911,8 +6911,8 @@
         </p:blipFill>
         <p:spPr>
           <a:xfrm>
-            <a:off x="5719571" y="2103120"/>
-            <a:ext cx="722376" cy="1033271"/>
+            <a:off x="5724144" y="2103120"/>
+            <a:ext cx="713232" cy="1033271"/>
           </a:xfrm>
           <a:prstGeom prst="rect">
             <a:avLst/>
@@ -8350,7 +8350,7 @@
         </p:nvSpPr>
         <p:spPr>
           <a:xfrm>
-            <a:off x="3575481" y="2080260"/>
+            <a:off x="3573957" y="2080260"/>
             <a:ext cx="4251856" cy="457200"/>
           </a:xfrm>
           <a:prstGeom prst="rect">
@@ -8379,7 +8379,7 @@
       </p:sp>
       <p:pic>
         <p:nvPicPr>
-          <p:cNvPr id="10" name="Picture 9" descr="279e9e7a584d29df.png"/>
+          <p:cNvPr id="10" name="Picture 9" descr="678b4dee4b21d5bd.png"/>
           <p:cNvPicPr>
             <a:picLocks noChangeAspect="1"/>
           </p:cNvPicPr>
@@ -8393,8 +8393,8 @@
         </p:blipFill>
         <p:spPr>
           <a:xfrm>
-            <a:off x="7690178" y="2138171"/>
-            <a:ext cx="725424" cy="341376"/>
+            <a:off x="7688654" y="2138171"/>
+            <a:ext cx="728472" cy="341376"/>
           </a:xfrm>
           <a:prstGeom prst="rect">
             <a:avLst/>
@@ -8409,7 +8409,7 @@
         </p:nvSpPr>
         <p:spPr>
           <a:xfrm>
-            <a:off x="8415602" y="2080260"/>
+            <a:off x="8417126" y="2080260"/>
             <a:ext cx="307595" cy="457200"/>
           </a:xfrm>
           <a:prstGeom prst="rect">
@@ -9222,7 +9222,7 @@
       </p:sp>
       <p:pic>
         <p:nvPicPr>
-          <p:cNvPr id="9" name="Picture 8" descr="f20596ac66be7a70.png"/>
+          <p:cNvPr id="9" name="Picture 8" descr="c896e7a3b1e79bee.png"/>
           <p:cNvPicPr>
             <a:picLocks noChangeAspect="1"/>
           </p:cNvPicPr>
@@ -9237,7 +9237,7 @@
         <p:spPr>
           <a:xfrm>
             <a:off x="5402580" y="2103120"/>
-            <a:ext cx="1356360" cy="527304"/>
+            <a:ext cx="1356360" cy="524256"/>
           </a:xfrm>
           <a:prstGeom prst="rect">
             <a:avLst/>
@@ -9252,7 +9252,7 @@
         </p:nvSpPr>
         <p:spPr>
           <a:xfrm>
-            <a:off x="1828800" y="2904743"/>
+            <a:off x="1828800" y="2901695"/>
             <a:ext cx="8503920" cy="548640"/>
           </a:xfrm>
           <a:prstGeom prst="rect">
@@ -10172,7 +10172,7 @@
       </p:sp>
       <p:pic>
         <p:nvPicPr>
-          <p:cNvPr id="9" name="Picture 8" descr="475c3eb32f30abcb.png"/>
+          <p:cNvPr id="9" name="Picture 8" descr="1b7d9d459c285456.png"/>
           <p:cNvPicPr>
             <a:picLocks noChangeAspect="1"/>
           </p:cNvPicPr>
@@ -11319,7 +11319,7 @@
       </p:sp>
       <p:pic>
         <p:nvPicPr>
-          <p:cNvPr id="9" name="Picture 8" descr="f75ba70705ade947.png"/>
+          <p:cNvPr id="9" name="Picture 8" descr="1768e3b0aaa3b8d0.png"/>
           <p:cNvPicPr>
             <a:picLocks noChangeAspect="1"/>
           </p:cNvPicPr>
@@ -11333,8 +11333,8 @@
         </p:blipFill>
         <p:spPr>
           <a:xfrm>
-            <a:off x="5355336" y="2103120"/>
-            <a:ext cx="1450848" cy="515112"/>
+            <a:off x="5356859" y="2103120"/>
+            <a:ext cx="1447800" cy="518160"/>
           </a:xfrm>
           <a:prstGeom prst="rect">
             <a:avLst/>
@@ -11349,7 +11349,7 @@
         </p:nvSpPr>
         <p:spPr>
           <a:xfrm>
-            <a:off x="777240" y="2846832"/>
+            <a:off x="777240" y="2849879"/>
             <a:ext cx="10607040" cy="465151"/>
           </a:xfrm>
           <a:prstGeom prst="rect">
@@ -11384,7 +11384,7 @@
         </p:nvSpPr>
         <p:spPr>
           <a:xfrm>
-            <a:off x="1874519" y="3513151"/>
+            <a:off x="1874519" y="3516199"/>
             <a:ext cx="4572000" cy="548640"/>
           </a:xfrm>
           <a:prstGeom prst="rect">
@@ -11437,7 +11437,7 @@
         </p:nvSpPr>
         <p:spPr>
           <a:xfrm>
-            <a:off x="6629400" y="3513151"/>
+            <a:off x="6629400" y="3516199"/>
             <a:ext cx="4572000" cy="548640"/>
           </a:xfrm>
           <a:prstGeom prst="rect">
@@ -11490,7 +11490,7 @@
         </p:nvSpPr>
         <p:spPr>
           <a:xfrm>
-            <a:off x="1874519" y="4198951"/>
+            <a:off x="1874519" y="4201999"/>
             <a:ext cx="4572000" cy="548640"/>
           </a:xfrm>
           <a:prstGeom prst="rect">
@@ -11534,7 +11534,7 @@
         </p:nvSpPr>
         <p:spPr>
           <a:xfrm>
-            <a:off x="6629400" y="4198951"/>
+            <a:off x="6629400" y="4201999"/>
             <a:ext cx="4572000" cy="548640"/>
           </a:xfrm>
           <a:prstGeom prst="rect">
@@ -11596,7 +11596,7 @@
         </p:nvSpPr>
         <p:spPr>
           <a:xfrm>
-            <a:off x="777240" y="5204791"/>
+            <a:off x="777240" y="5207839"/>
             <a:ext cx="10607040" cy="548640"/>
           </a:xfrm>
           <a:prstGeom prst="rect">
@@ -12254,7 +12254,7 @@
       </p:sp>
       <p:pic>
         <p:nvPicPr>
-          <p:cNvPr id="9" name="Picture 8" descr="206225517bbdc36d.png"/>
+          <p:cNvPr id="9" name="Picture 8" descr="00d9c35b01c5d10a.png"/>
           <p:cNvPicPr>
             <a:picLocks noChangeAspect="1"/>
           </p:cNvPicPr>
@@ -12268,8 +12268,8 @@
         </p:blipFill>
         <p:spPr>
           <a:xfrm>
-            <a:off x="5771388" y="2103120"/>
-            <a:ext cx="618744" cy="1005840"/>
+            <a:off x="5782055" y="2103120"/>
+            <a:ext cx="597408" cy="1005840"/>
           </a:xfrm>
           <a:prstGeom prst="rect">
             <a:avLst/>
@@ -13905,7 +13905,7 @@
       </p:sp>
       <p:pic>
         <p:nvPicPr>
-          <p:cNvPr id="12" name="Picture 11" descr="660742bc89c11a01.png"/>
+          <p:cNvPr id="12" name="Picture 11" descr="06d7fcaebeec005c.png"/>
           <p:cNvPicPr>
             <a:picLocks noChangeAspect="1"/>
           </p:cNvPicPr>
@@ -13919,8 +13919,8 @@
         </p:blipFill>
         <p:spPr>
           <a:xfrm>
-            <a:off x="5125212" y="2820924"/>
-            <a:ext cx="1911095" cy="347472"/>
+            <a:off x="5123687" y="2820924"/>
+            <a:ext cx="1914144" cy="347472"/>
           </a:xfrm>
           <a:prstGeom prst="rect">
             <a:avLst/>
@@ -14877,7 +14877,7 @@
       </p:sp>
       <p:pic>
         <p:nvPicPr>
-          <p:cNvPr id="10" name="Picture 9" descr="899d3ea6912bf446.png"/>
+          <p:cNvPr id="10" name="Picture 9" descr="3da309422df21aa5.png"/>
           <p:cNvPicPr>
             <a:picLocks noChangeAspect="1"/>
           </p:cNvPicPr>
@@ -14936,7 +14936,7 @@
       </p:sp>
       <p:pic>
         <p:nvPicPr>
-          <p:cNvPr id="12" name="Picture 11" descr="ab89a53f283b5554.png"/>
+          <p:cNvPr id="12" name="Picture 11" descr="50a3dff9085ab532.png"/>
           <p:cNvPicPr>
             <a:picLocks noChangeAspect="1"/>
           </p:cNvPicPr>
@@ -15001,7 +15001,7 @@
         </p:nvSpPr>
         <p:spPr>
           <a:xfrm>
-            <a:off x="2165540" y="2766060"/>
+            <a:off x="2164016" y="2766060"/>
             <a:ext cx="7013828" cy="457200"/>
           </a:xfrm>
           <a:prstGeom prst="rect">
@@ -15030,7 +15030,7 @@
       </p:sp>
       <p:pic>
         <p:nvPicPr>
-          <p:cNvPr id="15" name="Picture 14" descr="dbda9c11c9673f54.png"/>
+          <p:cNvPr id="15" name="Picture 14" descr="2cebf16dedade385.png"/>
           <p:cNvPicPr>
             <a:picLocks noChangeAspect="1"/>
           </p:cNvPicPr>
@@ -15044,8 +15044,8 @@
         </p:blipFill>
         <p:spPr>
           <a:xfrm>
-            <a:off x="9042208" y="2854452"/>
-            <a:ext cx="783336" cy="280416"/>
+            <a:off x="9040684" y="2854452"/>
+            <a:ext cx="786384" cy="280416"/>
           </a:xfrm>
           <a:prstGeom prst="rect">
             <a:avLst/>
@@ -15060,7 +15060,7 @@
         </p:nvSpPr>
         <p:spPr>
           <a:xfrm>
-            <a:off x="9825544" y="2766060"/>
+            <a:off x="9827068" y="2766060"/>
             <a:ext cx="307595" cy="457200"/>
           </a:xfrm>
           <a:prstGeom prst="rect">
@@ -17493,7 +17493,7 @@
       </p:graphicFrame>
       <p:pic>
         <p:nvPicPr>
-          <p:cNvPr id="12" name="Picture 11" descr="87675c2f7467729d.png"/>
+          <p:cNvPr id="12" name="Picture 11" descr="566883ffdb25670b.png"/>
           <p:cNvPicPr>
             <a:picLocks noChangeAspect="1"/>
           </p:cNvPicPr>
@@ -17507,8 +17507,8 @@
         </p:blipFill>
         <p:spPr>
           <a:xfrm>
-            <a:off x="3139729" y="3337560"/>
-            <a:ext cx="1341120" cy="676656"/>
+            <a:off x="3141253" y="3337560"/>
+            <a:ext cx="1335024" cy="676656"/>
           </a:xfrm>
           <a:prstGeom prst="rect">
             <a:avLst/>
@@ -17523,7 +17523,7 @@
         </p:nvSpPr>
         <p:spPr>
           <a:xfrm>
-            <a:off x="4480849" y="3447288"/>
+            <a:off x="4476277" y="3447288"/>
             <a:ext cx="1183151" cy="457200"/>
           </a:xfrm>
           <a:prstGeom prst="rect">
@@ -17552,7 +17552,7 @@
       </p:sp>
       <p:pic>
         <p:nvPicPr>
-          <p:cNvPr id="14" name="Picture 13" descr="2adecdac76fbb78c.png"/>
+          <p:cNvPr id="14" name="Picture 13" descr="bdac5bab61ffd0ec.png"/>
           <p:cNvPicPr>
             <a:picLocks noChangeAspect="1"/>
           </p:cNvPicPr>
@@ -17566,8 +17566,8 @@
         </p:blipFill>
         <p:spPr>
           <a:xfrm>
-            <a:off x="5526841" y="3337560"/>
-            <a:ext cx="1359408" cy="676656"/>
+            <a:off x="5522269" y="3337560"/>
+            <a:ext cx="1362456" cy="676656"/>
           </a:xfrm>
           <a:prstGeom prst="rect">
             <a:avLst/>
@@ -17582,7 +17582,7 @@
         </p:nvSpPr>
         <p:spPr>
           <a:xfrm>
-            <a:off x="6886249" y="3447288"/>
+            <a:off x="6884725" y="3447288"/>
             <a:ext cx="1299682" cy="457200"/>
           </a:xfrm>
           <a:prstGeom prst="rect">
@@ -17611,7 +17611,7 @@
       </p:sp>
       <p:pic>
         <p:nvPicPr>
-          <p:cNvPr id="16" name="Picture 15" descr="69a124f957c6b4cc.png"/>
+          <p:cNvPr id="16" name="Picture 15" descr="3202774bcb053046.png"/>
           <p:cNvPicPr>
             <a:picLocks noChangeAspect="1"/>
           </p:cNvPicPr>
@@ -17625,7 +17625,7 @@
         </p:blipFill>
         <p:spPr>
           <a:xfrm>
-            <a:off x="8048771" y="3506724"/>
+            <a:off x="8047247" y="3506724"/>
             <a:ext cx="783336" cy="338328"/>
           </a:xfrm>
           <a:prstGeom prst="rect">
@@ -17641,7 +17641,7 @@
         </p:nvSpPr>
         <p:spPr>
           <a:xfrm>
-            <a:off x="8832107" y="3447288"/>
+            <a:off x="8830583" y="3447288"/>
             <a:ext cx="326842" cy="457200"/>
           </a:xfrm>
           <a:prstGeom prst="rect">
@@ -17968,7 +17968,7 @@
       </p:cxnSp>
       <p:pic>
         <p:nvPicPr>
-          <p:cNvPr id="10" name="Picture 9" descr="0ab69ecc143d70bd.png"/>
+          <p:cNvPr id="10" name="Picture 9" descr="7f7d04d8cca9730e.png"/>
           <p:cNvPicPr>
             <a:picLocks noChangeAspect="1"/>
           </p:cNvPicPr>
@@ -17982,8 +17982,8 @@
         </p:blipFill>
         <p:spPr>
           <a:xfrm>
-            <a:off x="2251944" y="2377440"/>
-            <a:ext cx="1517904" cy="743712"/>
+            <a:off x="2267184" y="2377440"/>
+            <a:ext cx="1508760" cy="743712"/>
           </a:xfrm>
           <a:prstGeom prst="rect">
             <a:avLst/>
@@ -17998,7 +17998,7 @@
         </p:nvSpPr>
         <p:spPr>
           <a:xfrm>
-            <a:off x="3769848" y="2520696"/>
+            <a:off x="3775944" y="2520696"/>
             <a:ext cx="1183151" cy="457200"/>
           </a:xfrm>
           <a:prstGeom prst="rect">
@@ -18027,7 +18027,7 @@
       </p:sp>
       <p:pic>
         <p:nvPicPr>
-          <p:cNvPr id="12" name="Picture 11" descr="60630814804bfc07.png"/>
+          <p:cNvPr id="12" name="Picture 11" descr="4816a7a2bcf2f26c.png"/>
           <p:cNvPicPr>
             <a:picLocks noChangeAspect="1"/>
           </p:cNvPicPr>
@@ -18041,8 +18041,8 @@
         </p:blipFill>
         <p:spPr>
           <a:xfrm>
-            <a:off x="4815839" y="2340864"/>
-            <a:ext cx="2221992" cy="816864"/>
+            <a:off x="4821935" y="2340864"/>
+            <a:ext cx="2209800" cy="816864"/>
           </a:xfrm>
           <a:prstGeom prst="rect">
             <a:avLst/>
@@ -18057,7 +18057,7 @@
         </p:nvSpPr>
         <p:spPr>
           <a:xfrm>
-            <a:off x="7037831" y="2520696"/>
+            <a:off x="7031736" y="2520696"/>
             <a:ext cx="1183151" cy="457200"/>
           </a:xfrm>
           <a:prstGeom prst="rect">
@@ -18086,7 +18086,7 @@
       </p:sp>
       <p:pic>
         <p:nvPicPr>
-          <p:cNvPr id="14" name="Picture 13" descr="68ed09bab003c534.png"/>
+          <p:cNvPr id="14" name="Picture 13" descr="0f65a6bfbd89b504.png"/>
           <p:cNvPicPr>
             <a:picLocks noChangeAspect="1"/>
           </p:cNvPicPr>
@@ -18100,8 +18100,8 @@
         </p:blipFill>
         <p:spPr>
           <a:xfrm>
-            <a:off x="8083823" y="2345436"/>
-            <a:ext cx="1825752" cy="807720"/>
+            <a:off x="8077727" y="2345436"/>
+            <a:ext cx="1816608" cy="807720"/>
           </a:xfrm>
           <a:prstGeom prst="rect">
             <a:avLst/>
@@ -18110,7 +18110,7 @@
       </p:pic>
       <p:pic>
         <p:nvPicPr>
-          <p:cNvPr id="15" name="Picture 14" descr="69e3ce7992a6978e.png"/>
+          <p:cNvPr id="15" name="Picture 14" descr="70bc6e0f1b3ecac9.png"/>
           <p:cNvPicPr>
             <a:picLocks noChangeAspect="1"/>
           </p:cNvPicPr>
@@ -18124,8 +18124,8 @@
         </p:blipFill>
         <p:spPr>
           <a:xfrm>
-            <a:off x="4919471" y="3432047"/>
-            <a:ext cx="2322576" cy="920495"/>
+            <a:off x="4928616" y="3432047"/>
+            <a:ext cx="2304288" cy="920495"/>
           </a:xfrm>
           <a:prstGeom prst="rect">
             <a:avLst/>
@@ -18467,7 +18467,7 @@
       </p:cxnSp>
       <p:pic>
         <p:nvPicPr>
-          <p:cNvPr id="10" name="Picture 9" descr="5513b8e8cb2d27bd.png"/>
+          <p:cNvPr id="10" name="Picture 9" descr="47aaf26d66cf989f.png"/>
           <p:cNvPicPr>
             <a:picLocks noChangeAspect="1"/>
           </p:cNvPicPr>
@@ -18481,8 +18481,8 @@
         </p:blipFill>
         <p:spPr>
           <a:xfrm>
-            <a:off x="1433820" y="2374392"/>
-            <a:ext cx="4462272" cy="740664"/>
+            <a:off x="1446012" y="2374392"/>
+            <a:ext cx="4456176" cy="740664"/>
           </a:xfrm>
           <a:prstGeom prst="rect">
             <a:avLst/>
@@ -18497,7 +18497,7 @@
         </p:nvSpPr>
         <p:spPr>
           <a:xfrm>
-            <a:off x="5896092" y="2516124"/>
+            <a:off x="5902188" y="2516124"/>
             <a:ext cx="1183151" cy="457200"/>
           </a:xfrm>
           <a:prstGeom prst="rect">
@@ -18526,7 +18526,7 @@
       </p:sp>
       <p:pic>
         <p:nvPicPr>
-          <p:cNvPr id="12" name="Picture 11" descr="003efac2bd7b70d9.png"/>
+          <p:cNvPr id="12" name="Picture 11" descr="1fc48e462d92b635.png"/>
           <p:cNvPicPr>
             <a:picLocks noChangeAspect="1"/>
           </p:cNvPicPr>
@@ -18540,8 +18540,8 @@
         </p:blipFill>
         <p:spPr>
           <a:xfrm>
-            <a:off x="6942083" y="2340864"/>
-            <a:ext cx="3785615" cy="807720"/>
+            <a:off x="6948179" y="2340864"/>
+            <a:ext cx="3767328" cy="807720"/>
           </a:xfrm>
           <a:prstGeom prst="rect">
             <a:avLst/>
@@ -18550,7 +18550,7 @@
       </p:pic>
       <p:pic>
         <p:nvPicPr>
-          <p:cNvPr id="13" name="Picture 12" descr="e889baf54ca49aca.png"/>
+          <p:cNvPr id="13" name="Picture 12" descr="92a6d22e61379cff.png"/>
           <p:cNvPicPr>
             <a:picLocks noChangeAspect="1"/>
           </p:cNvPicPr>
@@ -18564,8 +18564,8 @@
         </p:blipFill>
         <p:spPr>
           <a:xfrm>
-            <a:off x="4325112" y="3422904"/>
-            <a:ext cx="3511296" cy="819912"/>
+            <a:off x="4328159" y="3422904"/>
+            <a:ext cx="3505200" cy="819912"/>
           </a:xfrm>
           <a:prstGeom prst="rect">
             <a:avLst/>
@@ -19194,7 +19194,7 @@
       </p:sp>
       <p:pic>
         <p:nvPicPr>
-          <p:cNvPr id="9" name="Picture 8" descr="cb6908d478c4c4d5.png"/>
+          <p:cNvPr id="9" name="Picture 8" descr="99ce65e5c8ec578d.png"/>
           <p:cNvPicPr>
             <a:picLocks noChangeAspect="1"/>
           </p:cNvPicPr>
@@ -19209,7 +19209,7 @@
         <p:spPr>
           <a:xfrm>
             <a:off x="1828800" y="1920240"/>
-            <a:ext cx="6169152" cy="423672"/>
+            <a:ext cx="6172200" cy="423672"/>
           </a:xfrm>
           <a:prstGeom prst="rect">
             <a:avLst/>
@@ -19224,8 +19224,8 @@
         </p:nvSpPr>
         <p:spPr>
           <a:xfrm>
-            <a:off x="8455152" y="1903476"/>
-            <a:ext cx="2929128" cy="502920"/>
+            <a:off x="8458200" y="1903476"/>
+            <a:ext cx="2926079" cy="502920"/>
           </a:xfrm>
           <a:prstGeom prst="rect">
             <a:avLst/>
@@ -19253,7 +19253,7 @@
       </p:sp>
       <p:pic>
         <p:nvPicPr>
-          <p:cNvPr id="11" name="Picture 10" descr="3b9efb2695797439.png"/>
+          <p:cNvPr id="11" name="Picture 10" descr="52caabd3337864a9.png"/>
           <p:cNvPicPr>
             <a:picLocks noChangeAspect="1"/>
           </p:cNvPicPr>
@@ -19268,7 +19268,7 @@
         <p:spPr>
           <a:xfrm>
             <a:off x="1828800" y="2618232"/>
-            <a:ext cx="2828544" cy="883920"/>
+            <a:ext cx="2816352" cy="883920"/>
           </a:xfrm>
           <a:prstGeom prst="rect">
             <a:avLst/>
@@ -19283,8 +19283,8 @@
         </p:nvSpPr>
         <p:spPr>
           <a:xfrm>
-            <a:off x="5114544" y="2831592"/>
-            <a:ext cx="6269735" cy="502920"/>
+            <a:off x="5102352" y="2831592"/>
+            <a:ext cx="6281927" cy="502920"/>
           </a:xfrm>
           <a:prstGeom prst="rect">
             <a:avLst/>

--- a/a7/build/out/u3/A7 3.T2  Slides.pptx
+++ b/a7/build/out/u3/A7 3.T2  Slides.pptx
@@ -9699,7 +9699,7 @@
                 </a:solidFill>
                 <a:latin typeface="Century Schoolbook"/>
               </a:rPr>
-              <a:t>1/x</a:t>
+              <a:t>−x</a:t>
             </a:r>
             <a:r>
               <a:rPr sz="2400" b="0" i="0" baseline="30000">
@@ -9752,7 +9752,7 @@
                 </a:solidFill>
                 <a:latin typeface="Century Schoolbook"/>
               </a:rPr>
-              <a:t>x</a:t>
+              <a:t>1/x</a:t>
             </a:r>
             <a:r>
               <a:rPr sz="2400" b="0" i="0" baseline="30000">
@@ -9761,7 +9761,7 @@
                 </a:solidFill>
                 <a:latin typeface="Century Schoolbook"/>
               </a:rPr>
-              <a:t>10</a:t>
+              <a:t>24</a:t>
             </a:r>
           </a:p>
         </p:txBody>
@@ -9814,7 +9814,7 @@
                 </a:solidFill>
                 <a:latin typeface="Century Schoolbook"/>
               </a:rPr>
-              <a:t>24</a:t>
+              <a:t>2</a:t>
             </a:r>
           </a:p>
         </p:txBody>
@@ -9858,7 +9858,7 @@
                 </a:solidFill>
                 <a:latin typeface="Century Schoolbook"/>
               </a:rPr>
-              <a:t>−x</a:t>
+              <a:t>x</a:t>
             </a:r>
             <a:r>
               <a:rPr sz="2400" b="0" i="0" baseline="30000">
@@ -9867,7 +9867,7 @@
                 </a:solidFill>
                 <a:latin typeface="Century Schoolbook"/>
               </a:rPr>
-              <a:t>2</a:t>
+              <a:t>10</a:t>
             </a:r>
           </a:p>
         </p:txBody>
@@ -10255,25 +10255,25 @@
             <a:r>
               <a:rPr sz="2400" b="1" i="0">
                 <a:solidFill>
-                  <a:srgbClr val="9E1B32"/>
+                  <a:srgbClr val="1A1A1A"/>
                 </a:solidFill>
                 <a:latin typeface="Century Schoolbook"/>
               </a:rPr>
               <a:t>A.   </a:t>
             </a:r>
             <a:r>
-              <a:rPr sz="2400" b="1" i="0">
-                <a:solidFill>
-                  <a:srgbClr val="9E1B32"/>
-                </a:solidFill>
-                <a:latin typeface="Century Schoolbook"/>
-              </a:rPr>
-              <a:t>1/x</a:t>
-            </a:r>
-            <a:r>
-              <a:rPr sz="2400" b="1" i="0" baseline="30000">
-                <a:solidFill>
-                  <a:srgbClr val="9E1B32"/>
+              <a:rPr sz="2400" b="0" i="0">
+                <a:solidFill>
+                  <a:srgbClr val="1A1A1A"/>
+                </a:solidFill>
+                <a:latin typeface="Century Schoolbook"/>
+              </a:rPr>
+              <a:t>−x</a:t>
+            </a:r>
+            <a:r>
+              <a:rPr sz="2400" b="0" i="0" baseline="30000">
+                <a:solidFill>
+                  <a:srgbClr val="1A1A1A"/>
                 </a:solidFill>
                 <a:latin typeface="Century Schoolbook"/>
               </a:rPr>
@@ -10321,7 +10321,7 @@
                 </a:solidFill>
                 <a:latin typeface="Century Schoolbook"/>
               </a:rPr>
-              <a:t>x</a:t>
+              <a:t>1/x</a:t>
             </a:r>
             <a:r>
               <a:rPr sz="2400" b="0" i="0" baseline="30000">
@@ -10330,7 +10330,7 @@
                 </a:solidFill>
                 <a:latin typeface="Century Schoolbook"/>
               </a:rPr>
-              <a:t>10</a:t>
+              <a:t>24</a:t>
             </a:r>
           </a:p>
         </p:txBody>
@@ -10361,29 +10361,29 @@
             <a:r>
               <a:rPr sz="2400" b="1" i="0">
                 <a:solidFill>
-                  <a:srgbClr val="1A1A1A"/>
+                  <a:srgbClr val="9E1B32"/>
                 </a:solidFill>
                 <a:latin typeface="Century Schoolbook"/>
               </a:rPr>
               <a:t>C.   </a:t>
             </a:r>
             <a:r>
-              <a:rPr sz="2400" b="0" i="0">
-                <a:solidFill>
-                  <a:srgbClr val="1A1A1A"/>
+              <a:rPr sz="2400" b="1" i="0">
+                <a:solidFill>
+                  <a:srgbClr val="9E1B32"/>
                 </a:solidFill>
                 <a:latin typeface="Century Schoolbook"/>
               </a:rPr>
               <a:t>1/x</a:t>
             </a:r>
             <a:r>
-              <a:rPr sz="2400" b="0" i="0" baseline="30000">
-                <a:solidFill>
-                  <a:srgbClr val="1A1A1A"/>
-                </a:solidFill>
-                <a:latin typeface="Century Schoolbook"/>
-              </a:rPr>
-              <a:t>24</a:t>
+              <a:rPr sz="2400" b="1" i="0" baseline="30000">
+                <a:solidFill>
+                  <a:srgbClr val="9E1B32"/>
+                </a:solidFill>
+                <a:latin typeface="Century Schoolbook"/>
+              </a:rPr>
+              <a:t>2</a:t>
             </a:r>
           </a:p>
         </p:txBody>
@@ -10427,7 +10427,7 @@
                 </a:solidFill>
                 <a:latin typeface="Century Schoolbook"/>
               </a:rPr>
-              <a:t>−x</a:t>
+              <a:t>x</a:t>
             </a:r>
             <a:r>
               <a:rPr sz="2400" b="0" i="0" baseline="30000">
@@ -10436,7 +10436,7 @@
                 </a:solidFill>
                 <a:latin typeface="Century Schoolbook"/>
               </a:rPr>
-              <a:t>2</a:t>
+              <a:t>10</a:t>
             </a:r>
           </a:p>
         </p:txBody>
@@ -10471,7 +10471,7 @@
                 </a:solidFill>
                 <a:latin typeface="Century Schoolbook"/>
               </a:rPr>
-              <a:t>Answer:   A — 1/x</a:t>
+              <a:t>Answer:   C — 1/x</a:t>
             </a:r>
             <a:r>
               <a:rPr sz="3200" b="1" i="0" baseline="30000">
@@ -10848,15 +10848,6 @@
               </a:rPr>
               <a:t>4/x</a:t>
             </a:r>
-            <a:r>
-              <a:rPr sz="2400" b="0" i="0" baseline="30000">
-                <a:solidFill>
-                  <a:srgbClr val="1A1A1A"/>
-                </a:solidFill>
-                <a:latin typeface="Century Schoolbook"/>
-              </a:rPr>
-              <a:t>6</a:t>
-            </a:r>
           </a:p>
         </p:txBody>
       </p:sp>
@@ -10899,7 +10890,7 @@
                 </a:solidFill>
                 <a:latin typeface="Century Schoolbook"/>
               </a:rPr>
-              <a:t>2/x</a:t>
+              <a:t>1/(4x</a:t>
             </a:r>
             <a:r>
               <a:rPr sz="2400" b="0" i="0" baseline="30000">
@@ -10909,6 +10900,15 @@
                 <a:latin typeface="Century Schoolbook"/>
               </a:rPr>
               <a:t>6</a:t>
+            </a:r>
+            <a:r>
+              <a:rPr sz="2400" b="0" i="0">
+                <a:solidFill>
+                  <a:srgbClr val="1A1A1A"/>
+                </a:solidFill>
+                <a:latin typeface="Century Schoolbook"/>
+              </a:rPr>
+              <a:t>)</a:t>
             </a:r>
           </a:p>
         </p:txBody>
@@ -10952,7 +10952,16 @@
                 </a:solidFill>
                 <a:latin typeface="Century Schoolbook"/>
               </a:rPr>
-              <a:t>4/x</a:t>
+              <a:t>2/x</a:t>
+            </a:r>
+            <a:r>
+              <a:rPr sz="2400" b="0" i="0" baseline="30000">
+                <a:solidFill>
+                  <a:srgbClr val="1A1A1A"/>
+                </a:solidFill>
+                <a:latin typeface="Century Schoolbook"/>
+              </a:rPr>
+              <a:t>6</a:t>
             </a:r>
           </a:p>
         </p:txBody>
@@ -10996,7 +11005,7 @@
                 </a:solidFill>
                 <a:latin typeface="Century Schoolbook"/>
               </a:rPr>
-              <a:t>1/(4x</a:t>
+              <a:t>4/x</a:t>
             </a:r>
             <a:r>
               <a:rPr sz="2400" b="0" i="0" baseline="30000">
@@ -11006,15 +11015,6 @@
                 <a:latin typeface="Century Schoolbook"/>
               </a:rPr>
               <a:t>6</a:t>
-            </a:r>
-            <a:r>
-              <a:rPr sz="2400" b="0" i="0">
-                <a:solidFill>
-                  <a:srgbClr val="1A1A1A"/>
-                </a:solidFill>
-                <a:latin typeface="Century Schoolbook"/>
-              </a:rPr>
-              <a:t>)</a:t>
             </a:r>
           </a:p>
         </p:txBody>
@@ -11402,29 +11402,20 @@
             <a:r>
               <a:rPr sz="2400" b="1" i="0">
                 <a:solidFill>
-                  <a:srgbClr val="9E1B32"/>
+                  <a:srgbClr val="1A1A1A"/>
                 </a:solidFill>
                 <a:latin typeface="Century Schoolbook"/>
               </a:rPr>
               <a:t>A.   </a:t>
             </a:r>
             <a:r>
-              <a:rPr sz="2400" b="1" i="0">
-                <a:solidFill>
-                  <a:srgbClr val="9E1B32"/>
+              <a:rPr sz="2400" b="0" i="0">
+                <a:solidFill>
+                  <a:srgbClr val="1A1A1A"/>
                 </a:solidFill>
                 <a:latin typeface="Century Schoolbook"/>
               </a:rPr>
               <a:t>4/x</a:t>
-            </a:r>
-            <a:r>
-              <a:rPr sz="2400" b="1" i="0" baseline="30000">
-                <a:solidFill>
-                  <a:srgbClr val="9E1B32"/>
-                </a:solidFill>
-                <a:latin typeface="Century Schoolbook"/>
-              </a:rPr>
-              <a:t>6</a:t>
             </a:r>
           </a:p>
         </p:txBody>
@@ -11468,7 +11459,7 @@
                 </a:solidFill>
                 <a:latin typeface="Century Schoolbook"/>
               </a:rPr>
-              <a:t>2/x</a:t>
+              <a:t>1/(4x</a:t>
             </a:r>
             <a:r>
               <a:rPr sz="2400" b="0" i="0" baseline="30000">
@@ -11478,6 +11469,15 @@
                 <a:latin typeface="Century Schoolbook"/>
               </a:rPr>
               <a:t>6</a:t>
+            </a:r>
+            <a:r>
+              <a:rPr sz="2400" b="0" i="0">
+                <a:solidFill>
+                  <a:srgbClr val="1A1A1A"/>
+                </a:solidFill>
+                <a:latin typeface="Century Schoolbook"/>
+              </a:rPr>
+              <a:t>)</a:t>
             </a:r>
           </a:p>
         </p:txBody>
@@ -11521,7 +11521,16 @@
                 </a:solidFill>
                 <a:latin typeface="Century Schoolbook"/>
               </a:rPr>
-              <a:t>4/x</a:t>
+              <a:t>2/x</a:t>
+            </a:r>
+            <a:r>
+              <a:rPr sz="2400" b="0" i="0" baseline="30000">
+                <a:solidFill>
+                  <a:srgbClr val="1A1A1A"/>
+                </a:solidFill>
+                <a:latin typeface="Century Schoolbook"/>
+              </a:rPr>
+              <a:t>6</a:t>
             </a:r>
           </a:p>
         </p:txBody>
@@ -11552,38 +11561,29 @@
             <a:r>
               <a:rPr sz="2400" b="1" i="0">
                 <a:solidFill>
-                  <a:srgbClr val="1A1A1A"/>
+                  <a:srgbClr val="9E1B32"/>
                 </a:solidFill>
                 <a:latin typeface="Century Schoolbook"/>
               </a:rPr>
               <a:t>D.   </a:t>
             </a:r>
             <a:r>
-              <a:rPr sz="2400" b="0" i="0">
-                <a:solidFill>
-                  <a:srgbClr val="1A1A1A"/>
-                </a:solidFill>
-                <a:latin typeface="Century Schoolbook"/>
-              </a:rPr>
-              <a:t>1/(4x</a:t>
-            </a:r>
-            <a:r>
-              <a:rPr sz="2400" b="0" i="0" baseline="30000">
-                <a:solidFill>
-                  <a:srgbClr val="1A1A1A"/>
+              <a:rPr sz="2400" b="1" i="0">
+                <a:solidFill>
+                  <a:srgbClr val="9E1B32"/>
+                </a:solidFill>
+                <a:latin typeface="Century Schoolbook"/>
+              </a:rPr>
+              <a:t>4/x</a:t>
+            </a:r>
+            <a:r>
+              <a:rPr sz="2400" b="1" i="0" baseline="30000">
+                <a:solidFill>
+                  <a:srgbClr val="9E1B32"/>
                 </a:solidFill>
                 <a:latin typeface="Century Schoolbook"/>
               </a:rPr>
               <a:t>6</a:t>
-            </a:r>
-            <a:r>
-              <a:rPr sz="2400" b="0" i="0">
-                <a:solidFill>
-                  <a:srgbClr val="1A1A1A"/>
-                </a:solidFill>
-                <a:latin typeface="Century Schoolbook"/>
-              </a:rPr>
-              <a:t>)</a:t>
             </a:r>
           </a:p>
         </p:txBody>
@@ -11618,7 +11618,7 @@
                 </a:solidFill>
                 <a:latin typeface="Century Schoolbook"/>
               </a:rPr>
-              <a:t>Answer:   A — 4/x</a:t>
+              <a:t>Answer:   D — 4/x</a:t>
             </a:r>
             <a:r>
               <a:rPr sz="3200" b="1" i="0" baseline="30000">

--- a/a7/build/out/u3/A7 3.T2  Slides.pptx
+++ b/a7/build/out/u3/A7 3.T2  Slides.pptx
@@ -7284,8 +7284,8 @@
         </p:nvSpPr>
         <p:spPr>
           <a:xfrm>
-            <a:off x="3575481" y="2171700"/>
-            <a:ext cx="4251856" cy="457200"/>
+            <a:off x="1234440" y="1851660"/>
+            <a:ext cx="4131960" cy="457200"/>
           </a:xfrm>
           <a:prstGeom prst="rect">
             <a:avLst/>
@@ -7300,20 +7300,20 @@
           <a:p>
             <a:pPr algn="l"/>
             <a:r>
-              <a:rPr sz="2600" b="0" i="0">
+              <a:rPr sz="2400" b="0" i="0">
                 <a:solidFill>
                   <a:srgbClr val="1A1A1A"/>
                 </a:solidFill>
                 <a:latin typeface="Century Schoolbook"/>
               </a:rPr>
-              <a:t>A model's scale factor is  </a:t>
+              <a:t>A lamp's brightness from  </a:t>
             </a:r>
           </a:p>
         </p:txBody>
       </p:sp>
       <p:pic>
         <p:nvPicPr>
-          <p:cNvPr id="10" name="Picture 9" descr="270dca7efd9a2928.png"/>
+          <p:cNvPr id="10" name="Picture 9" descr="36ab662f01dc4d91.png"/>
           <p:cNvPicPr>
             <a:picLocks noChangeAspect="1"/>
           </p:cNvPicPr>
@@ -7327,8 +7327,8 @@
         </p:blipFill>
         <p:spPr>
           <a:xfrm>
-            <a:off x="7690178" y="2229612"/>
-            <a:ext cx="725424" cy="341376"/>
+            <a:off x="5229240" y="2005584"/>
+            <a:ext cx="158496" cy="149352"/>
           </a:xfrm>
           <a:prstGeom prst="rect">
             <a:avLst/>
@@ -7343,8 +7343,8 @@
         </p:nvSpPr>
         <p:spPr>
           <a:xfrm>
-            <a:off x="8415602" y="2171700"/>
-            <a:ext cx="307595" cy="457200"/>
+            <a:off x="5387736" y="1851660"/>
+            <a:ext cx="2778188" cy="457200"/>
           </a:xfrm>
           <a:prstGeom prst="rect">
             <a:avLst/>
@@ -7359,90 +7359,208 @@
           <a:p>
             <a:pPr algn="l"/>
             <a:r>
-              <a:rPr sz="2600" b="0" i="0">
+              <a:rPr sz="2400" b="0" i="0">
                 <a:solidFill>
                   <a:srgbClr val="1A1A1A"/>
                 </a:solidFill>
                 <a:latin typeface="Century Schoolbook"/>
               </a:rPr>
-              <a:t>.</a:t>
-            </a:r>
-          </a:p>
-        </p:txBody>
-      </p:sp>
-      <p:sp>
-        <p:nvSpPr>
-          <p:cNvPr id="12" name="TextBox 11"/>
-          <p:cNvSpPr txBox="1"/>
-          <p:nvPr/>
-        </p:nvSpPr>
-        <p:spPr>
-          <a:xfrm>
-            <a:off x="777240" y="2880360"/>
-            <a:ext cx="10607040" cy="465151"/>
-          </a:xfrm>
-          <a:prstGeom prst="rect">
-            <a:avLst/>
-          </a:prstGeom>
-          <a:noFill/>
-        </p:spPr>
-        <p:txBody>
-          <a:bodyPr wrap="square" lIns="45720" rIns="45720" tIns="18288" bIns="18288" anchor="t">
-            <a:spAutoFit/>
-          </a:bodyPr>
-          <a:lstStyle/>
-          <a:p>
-            <a:pPr algn="ctr"/>
-            <a:r>
-              <a:rPr sz="2600" b="0" i="0">
+              <a:t>  meters away is  </a:t>
+            </a:r>
+          </a:p>
+        </p:txBody>
+      </p:sp>
+      <p:pic>
+        <p:nvPicPr>
+          <p:cNvPr id="12" name="Picture 11" descr="47fe29c90fa7b53b.png"/>
+          <p:cNvPicPr>
+            <a:picLocks noChangeAspect="1"/>
+          </p:cNvPicPr>
+          <p:nvPr/>
+        </p:nvPicPr>
+        <p:blipFill>
+          <a:blip r:embed="rId3"/>
+          <a:stretch>
+            <a:fillRect/>
+          </a:stretch>
+        </p:blipFill>
+        <p:spPr>
+          <a:xfrm>
+            <a:off x="8028765" y="1940052"/>
+            <a:ext cx="585216" cy="280416"/>
+          </a:xfrm>
+          <a:prstGeom prst="rect">
+            <a:avLst/>
+          </a:prstGeom>
+        </p:spPr>
+      </p:pic>
+      <p:sp>
+        <p:nvSpPr>
+          <p:cNvPr id="13" name="TextBox 12"/>
+          <p:cNvSpPr txBox="1"/>
+          <p:nvPr/>
+        </p:nvSpPr>
+        <p:spPr>
+          <a:xfrm>
+            <a:off x="8613981" y="1851660"/>
+            <a:ext cx="1251618" cy="457200"/>
+          </a:xfrm>
+          <a:prstGeom prst="rect">
+            <a:avLst/>
+          </a:prstGeom>
+          <a:noFill/>
+        </p:spPr>
+        <p:txBody>
+          <a:bodyPr wrap="none" lIns="45720" rIns="45720" tIns="18288" bIns="18288" anchor="ctr">
+            <a:noAutofit/>
+          </a:bodyPr>
+          <a:lstStyle/>
+          <a:p>
+            <a:pPr algn="l"/>
+            <a:r>
+              <a:rPr sz="2400" b="0" i="0">
                 <a:solidFill>
                   <a:srgbClr val="1A1A1A"/>
                 </a:solidFill>
                 <a:latin typeface="Century Schoolbook"/>
               </a:rPr>
-              <a:t>The model is 12 centimeters long.</a:t>
-            </a:r>
-          </a:p>
-        </p:txBody>
-      </p:sp>
-      <p:sp>
-        <p:nvSpPr>
-          <p:cNvPr id="13" name="TextBox 12"/>
-          <p:cNvSpPr txBox="1"/>
-          <p:nvPr/>
-        </p:nvSpPr>
-        <p:spPr>
-          <a:xfrm>
-            <a:off x="777240" y="3455239"/>
-            <a:ext cx="10607040" cy="465151"/>
-          </a:xfrm>
-          <a:prstGeom prst="rect">
-            <a:avLst/>
-          </a:prstGeom>
-          <a:noFill/>
-        </p:spPr>
-        <p:txBody>
-          <a:bodyPr wrap="square" lIns="45720" rIns="45720" tIns="18288" bIns="18288" anchor="t">
-            <a:spAutoFit/>
-          </a:bodyPr>
-          <a:lstStyle/>
-          <a:p>
-            <a:pPr algn="ctr"/>
-            <a:r>
-              <a:rPr sz="2600" b="0" i="0">
+              <a:t>  units.</a:t>
+            </a:r>
+          </a:p>
+        </p:txBody>
+      </p:sp>
+      <p:sp>
+        <p:nvSpPr>
+          <p:cNvPr id="14" name="TextBox 13"/>
+          <p:cNvSpPr txBox="1"/>
+          <p:nvPr/>
+        </p:nvSpPr>
+        <p:spPr>
+          <a:xfrm>
+            <a:off x="1234440" y="2487168"/>
+            <a:ext cx="10058400" cy="429370"/>
+          </a:xfrm>
+          <a:prstGeom prst="rect">
+            <a:avLst/>
+          </a:prstGeom>
+          <a:noFill/>
+        </p:spPr>
+        <p:txBody>
+          <a:bodyPr wrap="square" lIns="45720" rIns="45720" tIns="18288" bIns="18288" anchor="t">
+            <a:spAutoFit/>
+          </a:bodyPr>
+          <a:lstStyle/>
+          <a:p>
+            <a:pPr algn="l"/>
+            <a:r>
+              <a:rPr sz="2400" b="0" i="0">
                 <a:solidFill>
                   <a:srgbClr val="1A1A1A"/>
                 </a:solidFill>
                 <a:latin typeface="Century Schoolbook"/>
               </a:rPr>
-              <a:t>Rewrite the factor using only positive exponents.</a:t>
-            </a:r>
-          </a:p>
-        </p:txBody>
-      </p:sp>
-      <p:sp>
-        <p:nvSpPr>
-          <p:cNvPr id="14" name="TextBox 13"/>
+              <a:t>The lamp is 12 centimeters tall.</a:t>
+            </a:r>
+          </a:p>
+        </p:txBody>
+      </p:sp>
+      <p:sp>
+        <p:nvSpPr>
+          <p:cNvPr id="15" name="TextBox 14"/>
+          <p:cNvSpPr txBox="1"/>
+          <p:nvPr/>
+        </p:nvSpPr>
+        <p:spPr>
+          <a:xfrm>
+            <a:off x="1234440" y="3003406"/>
+            <a:ext cx="1746873" cy="457200"/>
+          </a:xfrm>
+          <a:prstGeom prst="rect">
+            <a:avLst/>
+          </a:prstGeom>
+          <a:noFill/>
+        </p:spPr>
+        <p:txBody>
+          <a:bodyPr wrap="none" lIns="45720" rIns="45720" tIns="18288" bIns="18288" anchor="ctr">
+            <a:noAutofit/>
+          </a:bodyPr>
+          <a:lstStyle/>
+          <a:p>
+            <a:pPr algn="l"/>
+            <a:r>
+              <a:rPr sz="2400" b="1" i="0">
+                <a:solidFill>
+                  <a:srgbClr val="1A1A1A"/>
+                </a:solidFill>
+                <a:latin typeface="Century Schoolbook"/>
+              </a:rPr>
+              <a:t>Rewrite  </a:t>
+            </a:r>
+          </a:p>
+        </p:txBody>
+      </p:sp>
+      <p:pic>
+        <p:nvPicPr>
+          <p:cNvPr id="16" name="Picture 15" descr="47fe29c90fa7b53b.png"/>
+          <p:cNvPicPr>
+            <a:picLocks noChangeAspect="1"/>
+          </p:cNvPicPr>
+          <p:nvPr/>
+        </p:nvPicPr>
+        <p:blipFill>
+          <a:blip r:embed="rId3"/>
+          <a:stretch>
+            <a:fillRect/>
+          </a:stretch>
+        </p:blipFill>
+        <p:spPr>
+          <a:xfrm>
+            <a:off x="2844153" y="3091798"/>
+            <a:ext cx="585216" cy="280416"/>
+          </a:xfrm>
+          <a:prstGeom prst="rect">
+            <a:avLst/>
+          </a:prstGeom>
+        </p:spPr>
+      </p:pic>
+      <p:sp>
+        <p:nvSpPr>
+          <p:cNvPr id="17" name="TextBox 16"/>
+          <p:cNvSpPr txBox="1"/>
+          <p:nvPr/>
+        </p:nvSpPr>
+        <p:spPr>
+          <a:xfrm>
+            <a:off x="3429369" y="3003406"/>
+            <a:ext cx="5452393" cy="457200"/>
+          </a:xfrm>
+          <a:prstGeom prst="rect">
+            <a:avLst/>
+          </a:prstGeom>
+          <a:noFill/>
+        </p:spPr>
+        <p:txBody>
+          <a:bodyPr wrap="none" lIns="45720" rIns="45720" tIns="18288" bIns="18288" anchor="ctr">
+            <a:noAutofit/>
+          </a:bodyPr>
+          <a:lstStyle/>
+          <a:p>
+            <a:pPr algn="l"/>
+            <a:r>
+              <a:rPr sz="2400" b="1" i="0">
+                <a:solidFill>
+                  <a:srgbClr val="1A1A1A"/>
+                </a:solidFill>
+                <a:latin typeface="Century Schoolbook"/>
+              </a:rPr>
+              <a:t>  using only positive exponents.</a:t>
+            </a:r>
+          </a:p>
+        </p:txBody>
+      </p:sp>
+      <p:sp>
+        <p:nvSpPr>
+          <p:cNvPr id="18" name="TextBox 17"/>
           <p:cNvSpPr txBox="1"/>
           <p:nvPr/>
         </p:nvSpPr>
@@ -7471,41 +7589,6 @@
                 <a:latin typeface="Century Schoolbook"/>
               </a:rPr>
               <a:t>Answer it.</a:t>
-            </a:r>
-          </a:p>
-        </p:txBody>
-      </p:sp>
-      <p:sp>
-        <p:nvSpPr>
-          <p:cNvPr id="15" name="TextBox 14"/>
-          <p:cNvSpPr txBox="1"/>
-          <p:nvPr/>
-        </p:nvSpPr>
-        <p:spPr>
-          <a:xfrm>
-            <a:off x="777240" y="4828032"/>
-            <a:ext cx="10607040" cy="365760"/>
-          </a:xfrm>
-          <a:prstGeom prst="rect">
-            <a:avLst/>
-          </a:prstGeom>
-          <a:noFill/>
-        </p:spPr>
-        <p:txBody>
-          <a:bodyPr wrap="square" lIns="45720" rIns="45720" tIns="18288" bIns="18288" anchor="t">
-            <a:spAutoFit/>
-          </a:bodyPr>
-          <a:lstStyle/>
-          <a:p>
-            <a:pPr algn="ctr"/>
-            <a:r>
-              <a:rPr sz="1900" b="0" i="1">
-                <a:solidFill>
-                  <a:srgbClr val="6B6B6B"/>
-                </a:solidFill>
-                <a:latin typeface="Century Schoolbook"/>
-              </a:rPr>
-              <a:t>Rewrite with a positive exponent.</a:t>
             </a:r>
           </a:p>
         </p:txBody>
@@ -8350,8 +8433,8 @@
         </p:nvSpPr>
         <p:spPr>
           <a:xfrm>
-            <a:off x="3573957" y="2080260"/>
-            <a:ext cx="4251856" cy="457200"/>
+            <a:off x="1234440" y="1851660"/>
+            <a:ext cx="4131960" cy="457200"/>
           </a:xfrm>
           <a:prstGeom prst="rect">
             <a:avLst/>
@@ -8366,20 +8449,20 @@
           <a:p>
             <a:pPr algn="l"/>
             <a:r>
-              <a:rPr sz="2600" b="0" i="0">
+              <a:rPr sz="2400" b="0" i="0">
                 <a:solidFill>
                   <a:srgbClr val="1A1A1A"/>
                 </a:solidFill>
                 <a:latin typeface="Century Schoolbook"/>
               </a:rPr>
-              <a:t>A model's scale factor is  </a:t>
+              <a:t>A lamp's brightness from  </a:t>
             </a:r>
           </a:p>
         </p:txBody>
       </p:sp>
       <p:pic>
         <p:nvPicPr>
-          <p:cNvPr id="10" name="Picture 9" descr="678b4dee4b21d5bd.png"/>
+          <p:cNvPr id="10" name="Picture 9" descr="36ab662f01dc4d91.png"/>
           <p:cNvPicPr>
             <a:picLocks noChangeAspect="1"/>
           </p:cNvPicPr>
@@ -8393,8 +8476,8 @@
         </p:blipFill>
         <p:spPr>
           <a:xfrm>
-            <a:off x="7688654" y="2138171"/>
-            <a:ext cx="728472" cy="341376"/>
+            <a:off x="5229240" y="2005584"/>
+            <a:ext cx="158496" cy="149352"/>
           </a:xfrm>
           <a:prstGeom prst="rect">
             <a:avLst/>
@@ -8409,8 +8492,8 @@
         </p:nvSpPr>
         <p:spPr>
           <a:xfrm>
-            <a:off x="8417126" y="2080260"/>
-            <a:ext cx="307595" cy="457200"/>
+            <a:off x="5387736" y="1851660"/>
+            <a:ext cx="2778188" cy="457200"/>
           </a:xfrm>
           <a:prstGeom prst="rect">
             <a:avLst/>
@@ -8425,160 +8508,20 @@
           <a:p>
             <a:pPr algn="l"/>
             <a:r>
-              <a:rPr sz="2600" b="0" i="0">
+              <a:rPr sz="2400" b="0" i="0">
                 <a:solidFill>
                   <a:srgbClr val="1A1A1A"/>
                 </a:solidFill>
                 <a:latin typeface="Century Schoolbook"/>
               </a:rPr>
-              <a:t>.</a:t>
-            </a:r>
-          </a:p>
-        </p:txBody>
-      </p:sp>
-      <p:sp>
-        <p:nvSpPr>
-          <p:cNvPr id="12" name="TextBox 11"/>
-          <p:cNvSpPr txBox="1"/>
-          <p:nvPr/>
-        </p:nvSpPr>
-        <p:spPr>
-          <a:xfrm>
-            <a:off x="777240" y="2788920"/>
-            <a:ext cx="10607040" cy="465151"/>
-          </a:xfrm>
-          <a:prstGeom prst="rect">
-            <a:avLst/>
-          </a:prstGeom>
-          <a:noFill/>
-        </p:spPr>
-        <p:txBody>
-          <a:bodyPr wrap="square" lIns="45720" rIns="45720" tIns="18288" bIns="18288" anchor="t">
-            <a:spAutoFit/>
-          </a:bodyPr>
-          <a:lstStyle/>
-          <a:p>
-            <a:pPr algn="ctr"/>
-            <a:r>
-              <a:rPr sz="2600" b="0" i="0">
-                <a:solidFill>
-                  <a:srgbClr val="1A1A1A"/>
-                </a:solidFill>
-                <a:latin typeface="Century Schoolbook"/>
-              </a:rPr>
-              <a:t>The model is 12 centimeters long.</a:t>
-            </a:r>
-          </a:p>
-        </p:txBody>
-      </p:sp>
-      <p:sp>
-        <p:nvSpPr>
-          <p:cNvPr id="13" name="TextBox 12"/>
-          <p:cNvSpPr txBox="1"/>
-          <p:nvPr/>
-        </p:nvSpPr>
-        <p:spPr>
-          <a:xfrm>
-            <a:off x="777240" y="3363799"/>
-            <a:ext cx="10607040" cy="465151"/>
-          </a:xfrm>
-          <a:prstGeom prst="rect">
-            <a:avLst/>
-          </a:prstGeom>
-          <a:noFill/>
-        </p:spPr>
-        <p:txBody>
-          <a:bodyPr wrap="square" lIns="45720" rIns="45720" tIns="18288" bIns="18288" anchor="t">
-            <a:spAutoFit/>
-          </a:bodyPr>
-          <a:lstStyle/>
-          <a:p>
-            <a:pPr algn="ctr"/>
-            <a:r>
-              <a:rPr sz="2600" b="0" i="0">
-                <a:solidFill>
-                  <a:srgbClr val="1A1A1A"/>
-                </a:solidFill>
-                <a:latin typeface="Century Schoolbook"/>
-              </a:rPr>
-              <a:t>Rewrite the factor using only positive exponents.</a:t>
-            </a:r>
-          </a:p>
-        </p:txBody>
-      </p:sp>
-      <p:sp>
-        <p:nvSpPr>
-          <p:cNvPr id="14" name="TextBox 13"/>
-          <p:cNvSpPr txBox="1"/>
-          <p:nvPr/>
-        </p:nvSpPr>
-        <p:spPr>
-          <a:xfrm>
-            <a:off x="1828800" y="3984398"/>
-            <a:ext cx="8503920" cy="548640"/>
-          </a:xfrm>
-          <a:prstGeom prst="rect">
-            <a:avLst/>
-          </a:prstGeom>
-          <a:noFill/>
-        </p:spPr>
-        <p:txBody>
-          <a:bodyPr wrap="square" lIns="45720" rIns="45720" tIns="18288" bIns="18288" anchor="t">
-            <a:spAutoFit/>
-          </a:bodyPr>
-          <a:lstStyle/>
-          <a:p>
-            <a:pPr algn="ctr"/>
-            <a:r>
-              <a:rPr sz="2400" b="0" i="0">
-                <a:solidFill>
-                  <a:srgbClr val="6B6B6B"/>
-                </a:solidFill>
-                <a:latin typeface="Century Schoolbook"/>
-              </a:rPr>
-              <a:t>only the x moves</a:t>
-            </a:r>
-          </a:p>
-        </p:txBody>
-      </p:sp>
-      <p:sp>
-        <p:nvSpPr>
-          <p:cNvPr id="15" name="TextBox 14"/>
-          <p:cNvSpPr txBox="1"/>
-          <p:nvPr/>
-        </p:nvSpPr>
-        <p:spPr>
-          <a:xfrm>
-            <a:off x="4881372" y="4907942"/>
-            <a:ext cx="1920240" cy="548640"/>
-          </a:xfrm>
-          <a:prstGeom prst="rect">
-            <a:avLst/>
-          </a:prstGeom>
-          <a:noFill/>
-        </p:spPr>
-        <p:txBody>
-          <a:bodyPr wrap="square" lIns="45720" rIns="45720" tIns="18288" bIns="18288" anchor="ctr">
-            <a:spAutoFit/>
-          </a:bodyPr>
-          <a:lstStyle/>
-          <a:p>
-            <a:pPr algn="l"/>
-            <a:r>
-              <a:rPr sz="3200" b="1" i="0">
-                <a:solidFill>
-                  <a:srgbClr val="9E1B32"/>
-                </a:solidFill>
-                <a:latin typeface="Century Schoolbook"/>
-              </a:rPr>
-              <a:t>Answer:</a:t>
+              <a:t>  meters away is  </a:t>
             </a:r>
           </a:p>
         </p:txBody>
       </p:sp>
       <p:pic>
         <p:nvPicPr>
-          <p:cNvPr id="16" name="Picture 15" descr="71f960ddecd24b62.png"/>
+          <p:cNvPr id="12" name="Picture 11" descr="69ad6c7cdf468fd0.png"/>
           <p:cNvPicPr>
             <a:picLocks noChangeAspect="1"/>
           </p:cNvPicPr>
@@ -8592,7 +8535,265 @@
         </p:blipFill>
         <p:spPr>
           <a:xfrm>
-            <a:off x="6801611" y="4715918"/>
+            <a:off x="8028765" y="1940052"/>
+            <a:ext cx="588264" cy="280416"/>
+          </a:xfrm>
+          <a:prstGeom prst="rect">
+            <a:avLst/>
+          </a:prstGeom>
+        </p:spPr>
+      </p:pic>
+      <p:sp>
+        <p:nvSpPr>
+          <p:cNvPr id="13" name="TextBox 12"/>
+          <p:cNvSpPr txBox="1"/>
+          <p:nvPr/>
+        </p:nvSpPr>
+        <p:spPr>
+          <a:xfrm>
+            <a:off x="8617029" y="1851660"/>
+            <a:ext cx="1251618" cy="457200"/>
+          </a:xfrm>
+          <a:prstGeom prst="rect">
+            <a:avLst/>
+          </a:prstGeom>
+          <a:noFill/>
+        </p:spPr>
+        <p:txBody>
+          <a:bodyPr wrap="none" lIns="45720" rIns="45720" tIns="18288" bIns="18288" anchor="ctr">
+            <a:noAutofit/>
+          </a:bodyPr>
+          <a:lstStyle/>
+          <a:p>
+            <a:pPr algn="l"/>
+            <a:r>
+              <a:rPr sz="2400" b="0" i="0">
+                <a:solidFill>
+                  <a:srgbClr val="1A1A1A"/>
+                </a:solidFill>
+                <a:latin typeface="Century Schoolbook"/>
+              </a:rPr>
+              <a:t>  units.</a:t>
+            </a:r>
+          </a:p>
+        </p:txBody>
+      </p:sp>
+      <p:sp>
+        <p:nvSpPr>
+          <p:cNvPr id="14" name="TextBox 13"/>
+          <p:cNvSpPr txBox="1"/>
+          <p:nvPr/>
+        </p:nvSpPr>
+        <p:spPr>
+          <a:xfrm>
+            <a:off x="1234440" y="2487168"/>
+            <a:ext cx="10058400" cy="429370"/>
+          </a:xfrm>
+          <a:prstGeom prst="rect">
+            <a:avLst/>
+          </a:prstGeom>
+          <a:noFill/>
+        </p:spPr>
+        <p:txBody>
+          <a:bodyPr wrap="square" lIns="45720" rIns="45720" tIns="18288" bIns="18288" anchor="t">
+            <a:spAutoFit/>
+          </a:bodyPr>
+          <a:lstStyle/>
+          <a:p>
+            <a:pPr algn="l"/>
+            <a:r>
+              <a:rPr sz="2400" b="0" i="0">
+                <a:solidFill>
+                  <a:srgbClr val="1A1A1A"/>
+                </a:solidFill>
+                <a:latin typeface="Century Schoolbook"/>
+              </a:rPr>
+              <a:t>The lamp is 12 centimeters tall.</a:t>
+            </a:r>
+          </a:p>
+        </p:txBody>
+      </p:sp>
+      <p:sp>
+        <p:nvSpPr>
+          <p:cNvPr id="15" name="TextBox 14"/>
+          <p:cNvSpPr txBox="1"/>
+          <p:nvPr/>
+        </p:nvSpPr>
+        <p:spPr>
+          <a:xfrm>
+            <a:off x="1234440" y="3003406"/>
+            <a:ext cx="1746873" cy="457200"/>
+          </a:xfrm>
+          <a:prstGeom prst="rect">
+            <a:avLst/>
+          </a:prstGeom>
+          <a:noFill/>
+        </p:spPr>
+        <p:txBody>
+          <a:bodyPr wrap="none" lIns="45720" rIns="45720" tIns="18288" bIns="18288" anchor="ctr">
+            <a:noAutofit/>
+          </a:bodyPr>
+          <a:lstStyle/>
+          <a:p>
+            <a:pPr algn="l"/>
+            <a:r>
+              <a:rPr sz="2400" b="1" i="0">
+                <a:solidFill>
+                  <a:srgbClr val="1A1A1A"/>
+                </a:solidFill>
+                <a:latin typeface="Century Schoolbook"/>
+              </a:rPr>
+              <a:t>Rewrite  </a:t>
+            </a:r>
+          </a:p>
+        </p:txBody>
+      </p:sp>
+      <p:pic>
+        <p:nvPicPr>
+          <p:cNvPr id="16" name="Picture 15" descr="69ad6c7cdf468fd0.png"/>
+          <p:cNvPicPr>
+            <a:picLocks noChangeAspect="1"/>
+          </p:cNvPicPr>
+          <p:nvPr/>
+        </p:nvPicPr>
+        <p:blipFill>
+          <a:blip r:embed="rId3"/>
+          <a:stretch>
+            <a:fillRect/>
+          </a:stretch>
+        </p:blipFill>
+        <p:spPr>
+          <a:xfrm>
+            <a:off x="2844153" y="3091798"/>
+            <a:ext cx="588264" cy="280416"/>
+          </a:xfrm>
+          <a:prstGeom prst="rect">
+            <a:avLst/>
+          </a:prstGeom>
+        </p:spPr>
+      </p:pic>
+      <p:sp>
+        <p:nvSpPr>
+          <p:cNvPr id="17" name="TextBox 16"/>
+          <p:cNvSpPr txBox="1"/>
+          <p:nvPr/>
+        </p:nvSpPr>
+        <p:spPr>
+          <a:xfrm>
+            <a:off x="3432417" y="3003406"/>
+            <a:ext cx="5452393" cy="457200"/>
+          </a:xfrm>
+          <a:prstGeom prst="rect">
+            <a:avLst/>
+          </a:prstGeom>
+          <a:noFill/>
+        </p:spPr>
+        <p:txBody>
+          <a:bodyPr wrap="none" lIns="45720" rIns="45720" tIns="18288" bIns="18288" anchor="ctr">
+            <a:noAutofit/>
+          </a:bodyPr>
+          <a:lstStyle/>
+          <a:p>
+            <a:pPr algn="l"/>
+            <a:r>
+              <a:rPr sz="2400" b="1" i="0">
+                <a:solidFill>
+                  <a:srgbClr val="1A1A1A"/>
+                </a:solidFill>
+                <a:latin typeface="Century Schoolbook"/>
+              </a:rPr>
+              <a:t>  using only positive exponents.</a:t>
+            </a:r>
+          </a:p>
+        </p:txBody>
+      </p:sp>
+      <p:sp>
+        <p:nvSpPr>
+          <p:cNvPr id="18" name="TextBox 17"/>
+          <p:cNvSpPr txBox="1"/>
+          <p:nvPr/>
+        </p:nvSpPr>
+        <p:spPr>
+          <a:xfrm>
+            <a:off x="1828800" y="3730354"/>
+            <a:ext cx="8503920" cy="548640"/>
+          </a:xfrm>
+          <a:prstGeom prst="rect">
+            <a:avLst/>
+          </a:prstGeom>
+          <a:noFill/>
+        </p:spPr>
+        <p:txBody>
+          <a:bodyPr wrap="square" lIns="45720" rIns="45720" tIns="18288" bIns="18288" anchor="t">
+            <a:spAutoFit/>
+          </a:bodyPr>
+          <a:lstStyle/>
+          <a:p>
+            <a:pPr algn="ctr"/>
+            <a:r>
+              <a:rPr sz="2400" b="0" i="0">
+                <a:solidFill>
+                  <a:srgbClr val="6B6B6B"/>
+                </a:solidFill>
+                <a:latin typeface="Century Schoolbook"/>
+              </a:rPr>
+              <a:t>only the x moves</a:t>
+            </a:r>
+          </a:p>
+        </p:txBody>
+      </p:sp>
+      <p:sp>
+        <p:nvSpPr>
+          <p:cNvPr id="19" name="TextBox 18"/>
+          <p:cNvSpPr txBox="1"/>
+          <p:nvPr/>
+        </p:nvSpPr>
+        <p:spPr>
+          <a:xfrm>
+            <a:off x="4881372" y="4855464"/>
+            <a:ext cx="1920240" cy="548640"/>
+          </a:xfrm>
+          <a:prstGeom prst="rect">
+            <a:avLst/>
+          </a:prstGeom>
+          <a:noFill/>
+        </p:spPr>
+        <p:txBody>
+          <a:bodyPr wrap="square" lIns="45720" rIns="45720" tIns="18288" bIns="18288" anchor="ctr">
+            <a:spAutoFit/>
+          </a:bodyPr>
+          <a:lstStyle/>
+          <a:p>
+            <a:pPr algn="l"/>
+            <a:r>
+              <a:rPr sz="3200" b="1" i="0">
+                <a:solidFill>
+                  <a:srgbClr val="9E1B32"/>
+                </a:solidFill>
+                <a:latin typeface="Century Schoolbook"/>
+              </a:rPr>
+              <a:t>Answer:</a:t>
+            </a:r>
+          </a:p>
+        </p:txBody>
+      </p:sp>
+      <p:pic>
+        <p:nvPicPr>
+          <p:cNvPr id="20" name="Picture 19" descr="71f960ddecd24b62.png"/>
+          <p:cNvPicPr>
+            <a:picLocks noChangeAspect="1"/>
+          </p:cNvPicPr>
+          <p:nvPr/>
+        </p:nvPicPr>
+        <p:blipFill>
+          <a:blip r:embed="rId4"/>
+          <a:stretch>
+            <a:fillRect/>
+          </a:stretch>
+        </p:blipFill>
+        <p:spPr>
+          <a:xfrm>
+            <a:off x="6801611" y="4663440"/>
             <a:ext cx="478536" cy="932688"/>
           </a:xfrm>
           <a:prstGeom prst="rect">

--- a/a7/build/out/u3/A7 3.T2  Slides.pptx
+++ b/a7/build/out/u3/A7 3.T2  Slides.pptx
@@ -7285,7 +7285,7 @@
         <p:spPr>
           <a:xfrm>
             <a:off x="1234440" y="1851660"/>
-            <a:ext cx="4131960" cy="457200"/>
+            <a:ext cx="4886043" cy="457200"/>
           </a:xfrm>
           <a:prstGeom prst="rect">
             <a:avLst/>
@@ -7306,7 +7306,7 @@
                 </a:solidFill>
                 <a:latin typeface="Century Schoolbook"/>
               </a:rPr>
-              <a:t>A lamp's brightness from  </a:t>
+              <a:t>The brightness of a lamp from  </a:t>
             </a:r>
           </a:p>
         </p:txBody>
@@ -7327,7 +7327,7 @@
         </p:blipFill>
         <p:spPr>
           <a:xfrm>
-            <a:off x="5229240" y="2005584"/>
+            <a:off x="5983323" y="2005584"/>
             <a:ext cx="158496" cy="149352"/>
           </a:xfrm>
           <a:prstGeom prst="rect">
@@ -7343,7 +7343,7 @@
         </p:nvSpPr>
         <p:spPr>
           <a:xfrm>
-            <a:off x="5387736" y="1851660"/>
+            <a:off x="6141819" y="1851660"/>
             <a:ext cx="2778188" cy="457200"/>
           </a:xfrm>
           <a:prstGeom prst="rect">
@@ -7386,7 +7386,7 @@
         </p:blipFill>
         <p:spPr>
           <a:xfrm>
-            <a:off x="8028765" y="1940052"/>
+            <a:off x="8782847" y="1940052"/>
             <a:ext cx="585216" cy="280416"/>
           </a:xfrm>
           <a:prstGeom prst="rect">
@@ -7402,7 +7402,7 @@
         </p:nvSpPr>
         <p:spPr>
           <a:xfrm>
-            <a:off x="8613981" y="1851660"/>
+            <a:off x="9368063" y="1851660"/>
             <a:ext cx="1251618" cy="457200"/>
           </a:xfrm>
           <a:prstGeom prst="rect">
@@ -7459,7 +7459,7 @@
                 </a:solidFill>
                 <a:latin typeface="Century Schoolbook"/>
               </a:rPr>
-              <a:t>The lamp is 12 centimeters tall.</a:t>
+              <a:t>The lamp is 15 centimeters tall.</a:t>
             </a:r>
           </a:p>
         </p:txBody>
@@ -7472,17 +7472,17 @@
         </p:nvSpPr>
         <p:spPr>
           <a:xfrm>
-            <a:off x="1234440" y="3003406"/>
-            <a:ext cx="1746873" cy="457200"/>
-          </a:xfrm>
-          <a:prstGeom prst="rect">
-            <a:avLst/>
-          </a:prstGeom>
-          <a:noFill/>
-        </p:spPr>
-        <p:txBody>
-          <a:bodyPr wrap="none" lIns="45720" rIns="45720" tIns="18288" bIns="18288" anchor="ctr">
-            <a:noAutofit/>
+            <a:off x="1234440" y="3026266"/>
+            <a:ext cx="10058400" cy="429370"/>
+          </a:xfrm>
+          <a:prstGeom prst="rect">
+            <a:avLst/>
+          </a:prstGeom>
+          <a:noFill/>
+        </p:spPr>
+        <p:txBody>
+          <a:bodyPr wrap="square" lIns="45720" rIns="45720" tIns="18288" bIns="18288" anchor="t">
+            <a:spAutoFit/>
           </a:bodyPr>
           <a:lstStyle/>
           <a:p>
@@ -7494,73 +7494,14 @@
                 </a:solidFill>
                 <a:latin typeface="Century Schoolbook"/>
               </a:rPr>
-              <a:t>Rewrite  </a:t>
-            </a:r>
-          </a:p>
-        </p:txBody>
-      </p:sp>
-      <p:pic>
-        <p:nvPicPr>
-          <p:cNvPr id="16" name="Picture 15" descr="47fe29c90fa7b53b.png"/>
-          <p:cNvPicPr>
-            <a:picLocks noChangeAspect="1"/>
-          </p:cNvPicPr>
-          <p:nvPr/>
-        </p:nvPicPr>
-        <p:blipFill>
-          <a:blip r:embed="rId3"/>
-          <a:stretch>
-            <a:fillRect/>
-          </a:stretch>
-        </p:blipFill>
-        <p:spPr>
-          <a:xfrm>
-            <a:off x="2844153" y="3091798"/>
-            <a:ext cx="585216" cy="280416"/>
-          </a:xfrm>
-          <a:prstGeom prst="rect">
-            <a:avLst/>
-          </a:prstGeom>
-        </p:spPr>
-      </p:pic>
-      <p:sp>
-        <p:nvSpPr>
-          <p:cNvPr id="17" name="TextBox 16"/>
-          <p:cNvSpPr txBox="1"/>
-          <p:nvPr/>
-        </p:nvSpPr>
-        <p:spPr>
-          <a:xfrm>
-            <a:off x="3429369" y="3003406"/>
-            <a:ext cx="5452393" cy="457200"/>
-          </a:xfrm>
-          <a:prstGeom prst="rect">
-            <a:avLst/>
-          </a:prstGeom>
-          <a:noFill/>
-        </p:spPr>
-        <p:txBody>
-          <a:bodyPr wrap="none" lIns="45720" rIns="45720" tIns="18288" bIns="18288" anchor="ctr">
-            <a:noAutofit/>
-          </a:bodyPr>
-          <a:lstStyle/>
-          <a:p>
-            <a:pPr algn="l"/>
-            <a:r>
-              <a:rPr sz="2400" b="1" i="0">
-                <a:solidFill>
-                  <a:srgbClr val="1A1A1A"/>
-                </a:solidFill>
-                <a:latin typeface="Century Schoolbook"/>
-              </a:rPr>
-              <a:t>  using only positive exponents.</a:t>
-            </a:r>
-          </a:p>
-        </p:txBody>
-      </p:sp>
-      <p:sp>
-        <p:nvSpPr>
-          <p:cNvPr id="18" name="TextBox 17"/>
+              <a:t>How bright is the lamp from 2 meters away?</a:t>
+            </a:r>
+          </a:p>
+        </p:txBody>
+      </p:sp>
+      <p:sp>
+        <p:nvSpPr>
+          <p:cNvPr id="16" name="TextBox 15"/>
           <p:cNvSpPr txBox="1"/>
           <p:nvPr/>
         </p:nvSpPr>
@@ -8434,7 +8375,7 @@
         <p:spPr>
           <a:xfrm>
             <a:off x="1234440" y="1851660"/>
-            <a:ext cx="4131960" cy="457200"/>
+            <a:ext cx="4886043" cy="457200"/>
           </a:xfrm>
           <a:prstGeom prst="rect">
             <a:avLst/>
@@ -8455,7 +8396,7 @@
                 </a:solidFill>
                 <a:latin typeface="Century Schoolbook"/>
               </a:rPr>
-              <a:t>A lamp's brightness from  </a:t>
+              <a:t>The brightness of a lamp from  </a:t>
             </a:r>
           </a:p>
         </p:txBody>
@@ -8476,7 +8417,7 @@
         </p:blipFill>
         <p:spPr>
           <a:xfrm>
-            <a:off x="5229240" y="2005584"/>
+            <a:off x="5983323" y="2005584"/>
             <a:ext cx="158496" cy="149352"/>
           </a:xfrm>
           <a:prstGeom prst="rect">
@@ -8492,7 +8433,7 @@
         </p:nvSpPr>
         <p:spPr>
           <a:xfrm>
-            <a:off x="5387736" y="1851660"/>
+            <a:off x="6141819" y="1851660"/>
             <a:ext cx="2778188" cy="457200"/>
           </a:xfrm>
           <a:prstGeom prst="rect">
@@ -8535,7 +8476,7 @@
         </p:blipFill>
         <p:spPr>
           <a:xfrm>
-            <a:off x="8028765" y="1940052"/>
+            <a:off x="8782847" y="1940052"/>
             <a:ext cx="588264" cy="280416"/>
           </a:xfrm>
           <a:prstGeom prst="rect">
@@ -8551,7 +8492,7 @@
         </p:nvSpPr>
         <p:spPr>
           <a:xfrm>
-            <a:off x="8617029" y="1851660"/>
+            <a:off x="9371111" y="1851660"/>
             <a:ext cx="1251618" cy="457200"/>
           </a:xfrm>
           <a:prstGeom prst="rect">
@@ -8608,7 +8549,7 @@
                 </a:solidFill>
                 <a:latin typeface="Century Schoolbook"/>
               </a:rPr>
-              <a:t>The lamp is 12 centimeters tall.</a:t>
+              <a:t>The lamp is 15 centimeters tall.</a:t>
             </a:r>
           </a:p>
         </p:txBody>
@@ -8621,17 +8562,17 @@
         </p:nvSpPr>
         <p:spPr>
           <a:xfrm>
-            <a:off x="1234440" y="3003406"/>
-            <a:ext cx="1746873" cy="457200"/>
-          </a:xfrm>
-          <a:prstGeom prst="rect">
-            <a:avLst/>
-          </a:prstGeom>
-          <a:noFill/>
-        </p:spPr>
-        <p:txBody>
-          <a:bodyPr wrap="none" lIns="45720" rIns="45720" tIns="18288" bIns="18288" anchor="ctr">
-            <a:noAutofit/>
+            <a:off x="1234440" y="3026266"/>
+            <a:ext cx="10058400" cy="429370"/>
+          </a:xfrm>
+          <a:prstGeom prst="rect">
+            <a:avLst/>
+          </a:prstGeom>
+          <a:noFill/>
+        </p:spPr>
+        <p:txBody>
+          <a:bodyPr wrap="square" lIns="45720" rIns="45720" tIns="18288" bIns="18288" anchor="t">
+            <a:spAutoFit/>
           </a:bodyPr>
           <a:lstStyle/>
           <a:p>
@@ -8643,143 +8584,111 @@
                 </a:solidFill>
                 <a:latin typeface="Century Schoolbook"/>
               </a:rPr>
-              <a:t>Rewrite  </a:t>
+              <a:t>How bright is the lamp from 2 meters away?</a:t>
+            </a:r>
+          </a:p>
+        </p:txBody>
+      </p:sp>
+      <p:sp>
+        <p:nvSpPr>
+          <p:cNvPr id="16" name="TextBox 15"/>
+          <p:cNvSpPr txBox="1"/>
+          <p:nvPr/>
+        </p:nvSpPr>
+        <p:spPr>
+          <a:xfrm>
+            <a:off x="1828800" y="3656804"/>
+            <a:ext cx="8503920" cy="548640"/>
+          </a:xfrm>
+          <a:prstGeom prst="rect">
+            <a:avLst/>
+          </a:prstGeom>
+          <a:noFill/>
+        </p:spPr>
+        <p:txBody>
+          <a:bodyPr wrap="square" lIns="45720" rIns="45720" tIns="18288" bIns="18288" anchor="t">
+            <a:spAutoFit/>
+          </a:bodyPr>
+          <a:lstStyle/>
+          <a:p>
+            <a:pPr algn="ctr"/>
+            <a:r>
+              <a:rPr sz="2400" b="0" i="0">
+                <a:solidFill>
+                  <a:srgbClr val="6B6B6B"/>
+                </a:solidFill>
+                <a:latin typeface="Century Schoolbook"/>
+              </a:rPr>
+              <a:t>3 · 2</a:t>
+            </a:r>
+            <a:r>
+              <a:rPr sz="2400" b="0" i="0" baseline="30000">
+                <a:solidFill>
+                  <a:srgbClr val="6B6B6B"/>
+                </a:solidFill>
+                <a:latin typeface="Century Schoolbook"/>
+              </a:rPr>
+              <a:t>-2</a:t>
+            </a:r>
+            <a:r>
+              <a:rPr sz="2400" b="0" i="0">
+                <a:solidFill>
+                  <a:srgbClr val="6B6B6B"/>
+                </a:solidFill>
+                <a:latin typeface="Century Schoolbook"/>
+              </a:rPr>
+              <a:t> = 3 over 2</a:t>
+            </a:r>
+            <a:r>
+              <a:rPr sz="2400" b="0" i="0" baseline="30000">
+                <a:solidFill>
+                  <a:srgbClr val="6B6B6B"/>
+                </a:solidFill>
+                <a:latin typeface="Century Schoolbook"/>
+              </a:rPr>
+              <a:t>2</a:t>
+            </a:r>
+          </a:p>
+        </p:txBody>
+      </p:sp>
+      <p:sp>
+        <p:nvSpPr>
+          <p:cNvPr id="17" name="TextBox 16"/>
+          <p:cNvSpPr txBox="1"/>
+          <p:nvPr/>
+        </p:nvSpPr>
+        <p:spPr>
+          <a:xfrm>
+            <a:off x="4991100" y="4815840"/>
+            <a:ext cx="1920240" cy="548640"/>
+          </a:xfrm>
+          <a:prstGeom prst="rect">
+            <a:avLst/>
+          </a:prstGeom>
+          <a:noFill/>
+        </p:spPr>
+        <p:txBody>
+          <a:bodyPr wrap="square" lIns="45720" rIns="45720" tIns="18288" bIns="18288" anchor="ctr">
+            <a:spAutoFit/>
+          </a:bodyPr>
+          <a:lstStyle/>
+          <a:p>
+            <a:pPr algn="l"/>
+            <a:r>
+              <a:rPr sz="3200" b="1" i="0">
+                <a:solidFill>
+                  <a:srgbClr val="9E1B32"/>
+                </a:solidFill>
+                <a:latin typeface="Century Schoolbook"/>
+              </a:rPr>
+              <a:t>Answer:</a:t>
             </a:r>
           </a:p>
         </p:txBody>
       </p:sp>
       <p:pic>
         <p:nvPicPr>
-          <p:cNvPr id="16" name="Picture 15" descr="69ad6c7cdf468fd0.png"/>
-          <p:cNvPicPr>
-            <a:picLocks noChangeAspect="1"/>
-          </p:cNvPicPr>
-          <p:nvPr/>
-        </p:nvPicPr>
-        <p:blipFill>
-          <a:blip r:embed="rId3"/>
-          <a:stretch>
-            <a:fillRect/>
-          </a:stretch>
-        </p:blipFill>
-        <p:spPr>
-          <a:xfrm>
-            <a:off x="2844153" y="3091798"/>
-            <a:ext cx="588264" cy="280416"/>
-          </a:xfrm>
-          <a:prstGeom prst="rect">
-            <a:avLst/>
-          </a:prstGeom>
-        </p:spPr>
-      </p:pic>
-      <p:sp>
-        <p:nvSpPr>
-          <p:cNvPr id="17" name="TextBox 16"/>
-          <p:cNvSpPr txBox="1"/>
-          <p:nvPr/>
-        </p:nvSpPr>
-        <p:spPr>
-          <a:xfrm>
-            <a:off x="3432417" y="3003406"/>
-            <a:ext cx="5452393" cy="457200"/>
-          </a:xfrm>
-          <a:prstGeom prst="rect">
-            <a:avLst/>
-          </a:prstGeom>
-          <a:noFill/>
-        </p:spPr>
-        <p:txBody>
-          <a:bodyPr wrap="none" lIns="45720" rIns="45720" tIns="18288" bIns="18288" anchor="ctr">
-            <a:noAutofit/>
-          </a:bodyPr>
-          <a:lstStyle/>
-          <a:p>
-            <a:pPr algn="l"/>
-            <a:r>
-              <a:rPr sz="2400" b="1" i="0">
-                <a:solidFill>
-                  <a:srgbClr val="1A1A1A"/>
-                </a:solidFill>
-                <a:latin typeface="Century Schoolbook"/>
-              </a:rPr>
-              <a:t>  using only positive exponents.</a:t>
-            </a:r>
-          </a:p>
-        </p:txBody>
-      </p:sp>
-      <p:sp>
-        <p:nvSpPr>
-          <p:cNvPr id="18" name="TextBox 17"/>
-          <p:cNvSpPr txBox="1"/>
-          <p:nvPr/>
-        </p:nvSpPr>
-        <p:spPr>
-          <a:xfrm>
-            <a:off x="1828800" y="3730354"/>
-            <a:ext cx="8503920" cy="548640"/>
-          </a:xfrm>
-          <a:prstGeom prst="rect">
-            <a:avLst/>
-          </a:prstGeom>
-          <a:noFill/>
-        </p:spPr>
-        <p:txBody>
-          <a:bodyPr wrap="square" lIns="45720" rIns="45720" tIns="18288" bIns="18288" anchor="t">
-            <a:spAutoFit/>
-          </a:bodyPr>
-          <a:lstStyle/>
-          <a:p>
-            <a:pPr algn="ctr"/>
-            <a:r>
-              <a:rPr sz="2400" b="0" i="0">
-                <a:solidFill>
-                  <a:srgbClr val="6B6B6B"/>
-                </a:solidFill>
-                <a:latin typeface="Century Schoolbook"/>
-              </a:rPr>
-              <a:t>only the x moves</a:t>
-            </a:r>
-          </a:p>
-        </p:txBody>
-      </p:sp>
-      <p:sp>
-        <p:nvSpPr>
-          <p:cNvPr id="19" name="TextBox 18"/>
-          <p:cNvSpPr txBox="1"/>
-          <p:nvPr/>
-        </p:nvSpPr>
-        <p:spPr>
-          <a:xfrm>
-            <a:off x="4881372" y="4855464"/>
-            <a:ext cx="1920240" cy="548640"/>
-          </a:xfrm>
-          <a:prstGeom prst="rect">
-            <a:avLst/>
-          </a:prstGeom>
-          <a:noFill/>
-        </p:spPr>
-        <p:txBody>
-          <a:bodyPr wrap="square" lIns="45720" rIns="45720" tIns="18288" bIns="18288" anchor="ctr">
-            <a:spAutoFit/>
-          </a:bodyPr>
-          <a:lstStyle/>
-          <a:p>
-            <a:pPr algn="l"/>
-            <a:r>
-              <a:rPr sz="3200" b="1" i="0">
-                <a:solidFill>
-                  <a:srgbClr val="9E1B32"/>
-                </a:solidFill>
-                <a:latin typeface="Century Schoolbook"/>
-              </a:rPr>
-              <a:t>Answer:</a:t>
-            </a:r>
-          </a:p>
-        </p:txBody>
-      </p:sp>
-      <p:pic>
-        <p:nvPicPr>
-          <p:cNvPr id="20" name="Picture 19" descr="71f960ddecd24b62.png"/>
+          <p:cNvPr id="18" name="Picture 17" descr="c414c4c741c779c8.png"/>
           <p:cNvPicPr>
             <a:picLocks noChangeAspect="1"/>
           </p:cNvPicPr>
@@ -8793,8 +8702,8 @@
         </p:blipFill>
         <p:spPr>
           <a:xfrm>
-            <a:off x="6801611" y="4663440"/>
-            <a:ext cx="478536" cy="932688"/>
+            <a:off x="6911340" y="4663440"/>
+            <a:ext cx="259080" cy="853440"/>
           </a:xfrm>
           <a:prstGeom prst="rect">
             <a:avLst/>

--- a/a7/build/out/u3/A7 3.T2  Slides.pptx
+++ b/a7/build/out/u3/A7 3.T2  Slides.pptx
@@ -15241,7 +15241,7 @@
         <p:spPr>
           <a:xfrm>
             <a:off x="777240" y="4663440"/>
-            <a:ext cx="10607040" cy="548640"/>
+            <a:ext cx="10607040" cy="1072896"/>
           </a:xfrm>
           <a:prstGeom prst="rect">
             <a:avLst/>
